--- a/Especializacion/Proyecto I/Clases/Sesion 07 - Marco legal · citación APA 7/Presentacion.pptx
+++ b/Especializacion/Proyecto I/Clases/Sesion 07 - Marco legal · citación APA 7/Presentacion.pptx
@@ -3361,41 +3361,6 @@
                 <a:latin typeface="Calibri"/>
               </a:rPr>
               <a:t> PROYECTO I</a:t>
-            </a:r>
-          </a:p>
-        </p:txBody>
-      </p:sp>
-      <p:sp>
-        <p:nvSpPr>
-          <p:cNvPr id="7" name="TextBox 6"/>
-          <p:cNvSpPr txBox="1"/>
-          <p:nvPr/>
-        </p:nvSpPr>
-        <p:spPr>
-          <a:xfrm>
-            <a:off x="2194560" y="6446520"/>
-            <a:ext cx="5943600" cy="274320"/>
-          </a:xfrm>
-          <a:prstGeom prst="rect">
-            <a:avLst/>
-          </a:prstGeom>
-          <a:noFill/>
-        </p:spPr>
-        <p:txBody>
-          <a:bodyPr wrap="square" anchor="t" lIns="0" rIns="0" tIns="0" bIns="0">
-            <a:spAutoFit/>
-          </a:bodyPr>
-          <a:lstStyle/>
-          <a:p>
-            <a:pPr algn="l"/>
-            <a:r>
-              <a:rPr sz="1000" b="1" i="0">
-                <a:solidFill>
-                  <a:srgbClr val="8F989D"/>
-                </a:solidFill>
-                <a:latin typeface="Calibri"/>
-              </a:rPr>
-              <a:t>Inicio 8:10 pm</a:t>
             </a:r>
           </a:p>
         </p:txBody>
@@ -4203,41 +4168,6 @@
         </p:nvSpPr>
         <p:spPr>
           <a:xfrm>
-            <a:off x="2194560" y="6446520"/>
-            <a:ext cx="5943600" cy="274320"/>
-          </a:xfrm>
-          <a:prstGeom prst="rect">
-            <a:avLst/>
-          </a:prstGeom>
-          <a:noFill/>
-        </p:spPr>
-        <p:txBody>
-          <a:bodyPr wrap="square" anchor="t" lIns="0" rIns="0" tIns="0" bIns="0">
-            <a:spAutoFit/>
-          </a:bodyPr>
-          <a:lstStyle/>
-          <a:p>
-            <a:pPr algn="l"/>
-            <a:r>
-              <a:rPr sz="1000" b="1" i="0">
-                <a:solidFill>
-                  <a:srgbClr val="8F989D"/>
-                </a:solidFill>
-                <a:latin typeface="Calibri"/>
-              </a:rPr>
-              <a:t>Inicio 8:10 pm</a:t>
-            </a:r>
-          </a:p>
-        </p:txBody>
-      </p:sp>
-      <p:sp>
-        <p:nvSpPr>
-          <p:cNvPr id="7" name="TextBox 6"/>
-          <p:cNvSpPr txBox="1"/>
-          <p:nvPr/>
-        </p:nvSpPr>
-        <p:spPr>
-          <a:xfrm>
             <a:off x="11094415" y="6446520"/>
             <a:ext cx="548640" cy="274320"/>
           </a:xfrm>
@@ -4725,41 +4655,6 @@
         </p:nvSpPr>
         <p:spPr>
           <a:xfrm>
-            <a:off x="2194560" y="6446520"/>
-            <a:ext cx="5943600" cy="274320"/>
-          </a:xfrm>
-          <a:prstGeom prst="rect">
-            <a:avLst/>
-          </a:prstGeom>
-          <a:noFill/>
-        </p:spPr>
-        <p:txBody>
-          <a:bodyPr wrap="square" anchor="t" lIns="0" rIns="0" tIns="0" bIns="0">
-            <a:spAutoFit/>
-          </a:bodyPr>
-          <a:lstStyle/>
-          <a:p>
-            <a:pPr algn="l"/>
-            <a:r>
-              <a:rPr sz="1000" b="1" i="0">
-                <a:solidFill>
-                  <a:srgbClr val="8F989D"/>
-                </a:solidFill>
-                <a:latin typeface="Calibri"/>
-              </a:rPr>
-              <a:t>Inicio 8:10 pm</a:t>
-            </a:r>
-          </a:p>
-        </p:txBody>
-      </p:sp>
-      <p:sp>
-        <p:nvSpPr>
-          <p:cNvPr id="6" name="TextBox 5"/>
-          <p:cNvSpPr txBox="1"/>
-          <p:nvPr/>
-        </p:nvSpPr>
-        <p:spPr>
-          <a:xfrm>
             <a:off x="11094415" y="6446520"/>
             <a:ext cx="548640" cy="274320"/>
           </a:xfrm>
@@ -5209,41 +5104,6 @@
         </p:nvSpPr>
         <p:spPr>
           <a:xfrm>
-            <a:off x="2194560" y="6446520"/>
-            <a:ext cx="5943600" cy="274320"/>
-          </a:xfrm>
-          <a:prstGeom prst="rect">
-            <a:avLst/>
-          </a:prstGeom>
-          <a:noFill/>
-        </p:spPr>
-        <p:txBody>
-          <a:bodyPr wrap="square" anchor="t" lIns="0" rIns="0" tIns="0" bIns="0">
-            <a:spAutoFit/>
-          </a:bodyPr>
-          <a:lstStyle/>
-          <a:p>
-            <a:pPr algn="l"/>
-            <a:r>
-              <a:rPr sz="1000" b="1" i="0">
-                <a:solidFill>
-                  <a:srgbClr val="8F989D"/>
-                </a:solidFill>
-                <a:latin typeface="Calibri"/>
-              </a:rPr>
-              <a:t>Inicio 8:10 pm</a:t>
-            </a:r>
-          </a:p>
-        </p:txBody>
-      </p:sp>
-      <p:sp>
-        <p:nvSpPr>
-          <p:cNvPr id="11" name="TextBox 10"/>
-          <p:cNvSpPr txBox="1"/>
-          <p:nvPr/>
-        </p:nvSpPr>
-        <p:spPr>
-          <a:xfrm>
             <a:off x="11094415" y="6446520"/>
             <a:ext cx="548640" cy="274320"/>
           </a:xfrm>
@@ -5487,41 +5347,6 @@
         </p:nvSpPr>
         <p:spPr>
           <a:xfrm>
-            <a:off x="2194560" y="6446520"/>
-            <a:ext cx="5943600" cy="274320"/>
-          </a:xfrm>
-          <a:prstGeom prst="rect">
-            <a:avLst/>
-          </a:prstGeom>
-          <a:noFill/>
-        </p:spPr>
-        <p:txBody>
-          <a:bodyPr wrap="square" anchor="t" lIns="0" rIns="0" tIns="0" bIns="0">
-            <a:spAutoFit/>
-          </a:bodyPr>
-          <a:lstStyle/>
-          <a:p>
-            <a:pPr algn="l"/>
-            <a:r>
-              <a:rPr sz="1000" b="1" i="0">
-                <a:solidFill>
-                  <a:srgbClr val="8F989D"/>
-                </a:solidFill>
-                <a:latin typeface="Calibri"/>
-              </a:rPr>
-              <a:t>Inicio 8:10 pm</a:t>
-            </a:r>
-          </a:p>
-        </p:txBody>
-      </p:sp>
-      <p:sp>
-        <p:nvSpPr>
-          <p:cNvPr id="7" name="TextBox 6"/>
-          <p:cNvSpPr txBox="1"/>
-          <p:nvPr/>
-        </p:nvSpPr>
-        <p:spPr>
-          <a:xfrm>
             <a:off x="11094415" y="6446520"/>
             <a:ext cx="548640" cy="274320"/>
           </a:xfrm>
@@ -6171,41 +5996,6 @@
         </p:nvSpPr>
         <p:spPr>
           <a:xfrm>
-            <a:off x="2194560" y="6446520"/>
-            <a:ext cx="5943600" cy="274320"/>
-          </a:xfrm>
-          <a:prstGeom prst="rect">
-            <a:avLst/>
-          </a:prstGeom>
-          <a:noFill/>
-        </p:spPr>
-        <p:txBody>
-          <a:bodyPr wrap="square" anchor="t" lIns="0" rIns="0" tIns="0" bIns="0">
-            <a:spAutoFit/>
-          </a:bodyPr>
-          <a:lstStyle/>
-          <a:p>
-            <a:pPr algn="l"/>
-            <a:r>
-              <a:rPr sz="1000" b="1" i="0">
-                <a:solidFill>
-                  <a:srgbClr val="8F989D"/>
-                </a:solidFill>
-                <a:latin typeface="Calibri"/>
-              </a:rPr>
-              <a:t>Inicio 8:10 pm</a:t>
-            </a:r>
-          </a:p>
-        </p:txBody>
-      </p:sp>
-      <p:sp>
-        <p:nvSpPr>
-          <p:cNvPr id="6" name="TextBox 5"/>
-          <p:cNvSpPr txBox="1"/>
-          <p:nvPr/>
-        </p:nvSpPr>
-        <p:spPr>
-          <a:xfrm>
             <a:off x="11094415" y="6446520"/>
             <a:ext cx="548640" cy="274320"/>
           </a:xfrm>
@@ -6235,7 +6025,7 @@
       </p:sp>
       <p:sp>
         <p:nvSpPr>
-          <p:cNvPr id="7" name="TextBox 6"/>
+          <p:cNvPr id="6" name="TextBox 5"/>
           <p:cNvSpPr txBox="1"/>
           <p:nvPr/>
         </p:nvSpPr>
@@ -6763,41 +6553,6 @@
         </p:nvSpPr>
         <p:spPr>
           <a:xfrm>
-            <a:off x="2194560" y="6446520"/>
-            <a:ext cx="5943600" cy="274320"/>
-          </a:xfrm>
-          <a:prstGeom prst="rect">
-            <a:avLst/>
-          </a:prstGeom>
-          <a:noFill/>
-        </p:spPr>
-        <p:txBody>
-          <a:bodyPr wrap="square" anchor="t" lIns="0" rIns="0" tIns="0" bIns="0">
-            <a:spAutoFit/>
-          </a:bodyPr>
-          <a:lstStyle/>
-          <a:p>
-            <a:pPr algn="l"/>
-            <a:r>
-              <a:rPr sz="1000" b="1" i="0">
-                <a:solidFill>
-                  <a:srgbClr val="8F989D"/>
-                </a:solidFill>
-                <a:latin typeface="Calibri"/>
-              </a:rPr>
-              <a:t>Inicio 8:10 pm</a:t>
-            </a:r>
-          </a:p>
-        </p:txBody>
-      </p:sp>
-      <p:sp>
-        <p:nvSpPr>
-          <p:cNvPr id="6" name="TextBox 5"/>
-          <p:cNvSpPr txBox="1"/>
-          <p:nvPr/>
-        </p:nvSpPr>
-        <p:spPr>
-          <a:xfrm>
             <a:off x="11094415" y="6446520"/>
             <a:ext cx="548640" cy="274320"/>
           </a:xfrm>
@@ -7231,41 +6986,6 @@
         </p:nvSpPr>
         <p:spPr>
           <a:xfrm>
-            <a:off x="2194560" y="6446520"/>
-            <a:ext cx="5943600" cy="274320"/>
-          </a:xfrm>
-          <a:prstGeom prst="rect">
-            <a:avLst/>
-          </a:prstGeom>
-          <a:noFill/>
-        </p:spPr>
-        <p:txBody>
-          <a:bodyPr wrap="square" anchor="t" lIns="0" rIns="0" tIns="0" bIns="0">
-            <a:spAutoFit/>
-          </a:bodyPr>
-          <a:lstStyle/>
-          <a:p>
-            <a:pPr algn="l"/>
-            <a:r>
-              <a:rPr sz="1000" b="1" i="0">
-                <a:solidFill>
-                  <a:srgbClr val="8F989D"/>
-                </a:solidFill>
-                <a:latin typeface="Calibri"/>
-              </a:rPr>
-              <a:t>Inicio 8:10 pm</a:t>
-            </a:r>
-          </a:p>
-        </p:txBody>
-      </p:sp>
-      <p:sp>
-        <p:nvSpPr>
-          <p:cNvPr id="6" name="TextBox 5"/>
-          <p:cNvSpPr txBox="1"/>
-          <p:nvPr/>
-        </p:nvSpPr>
-        <p:spPr>
-          <a:xfrm>
             <a:off x="11094415" y="6446520"/>
             <a:ext cx="548640" cy="274320"/>
           </a:xfrm>
@@ -7654,41 +7374,6 @@
         </p:nvSpPr>
         <p:spPr>
           <a:xfrm>
-            <a:off x="2194560" y="6446520"/>
-            <a:ext cx="5943600" cy="274320"/>
-          </a:xfrm>
-          <a:prstGeom prst="rect">
-            <a:avLst/>
-          </a:prstGeom>
-          <a:noFill/>
-        </p:spPr>
-        <p:txBody>
-          <a:bodyPr wrap="square" anchor="t" lIns="0" rIns="0" tIns="0" bIns="0">
-            <a:spAutoFit/>
-          </a:bodyPr>
-          <a:lstStyle/>
-          <a:p>
-            <a:pPr algn="l"/>
-            <a:r>
-              <a:rPr sz="1000" b="1" i="0">
-                <a:solidFill>
-                  <a:srgbClr val="8F989D"/>
-                </a:solidFill>
-                <a:latin typeface="Calibri"/>
-              </a:rPr>
-              <a:t>Inicio 8:10 pm</a:t>
-            </a:r>
-          </a:p>
-        </p:txBody>
-      </p:sp>
-      <p:sp>
-        <p:nvSpPr>
-          <p:cNvPr id="6" name="TextBox 5"/>
-          <p:cNvSpPr txBox="1"/>
-          <p:nvPr/>
-        </p:nvSpPr>
-        <p:spPr>
-          <a:xfrm>
             <a:off x="11094415" y="6446520"/>
             <a:ext cx="548640" cy="274320"/>
           </a:xfrm>
@@ -7935,41 +7620,6 @@
           </a:p>
         </p:txBody>
       </p:sp>
-      <p:sp>
-        <p:nvSpPr>
-          <p:cNvPr id="7" name="TextBox 6"/>
-          <p:cNvSpPr txBox="1"/>
-          <p:nvPr/>
-        </p:nvSpPr>
-        <p:spPr>
-          <a:xfrm>
-            <a:off x="2194560" y="6446520"/>
-            <a:ext cx="5943600" cy="274320"/>
-          </a:xfrm>
-          <a:prstGeom prst="rect">
-            <a:avLst/>
-          </a:prstGeom>
-          <a:noFill/>
-        </p:spPr>
-        <p:txBody>
-          <a:bodyPr wrap="square" anchor="t" lIns="0" rIns="0" tIns="0" bIns="0">
-            <a:spAutoFit/>
-          </a:bodyPr>
-          <a:lstStyle/>
-          <a:p>
-            <a:pPr algn="l"/>
-            <a:r>
-              <a:rPr sz="1000" b="1" i="0">
-                <a:solidFill>
-                  <a:srgbClr val="8F989D"/>
-                </a:solidFill>
-                <a:latin typeface="Calibri"/>
-              </a:rPr>
-              <a:t>Inicio 8:10 pm</a:t>
-            </a:r>
-          </a:p>
-        </p:txBody>
-      </p:sp>
     </p:spTree>
   </p:cSld>
   <p:clrMapOvr>
@@ -8394,41 +8044,6 @@
         </p:nvSpPr>
         <p:spPr>
           <a:xfrm>
-            <a:off x="2194560" y="6446520"/>
-            <a:ext cx="5943600" cy="274320"/>
-          </a:xfrm>
-          <a:prstGeom prst="rect">
-            <a:avLst/>
-          </a:prstGeom>
-          <a:noFill/>
-        </p:spPr>
-        <p:txBody>
-          <a:bodyPr wrap="square" anchor="t" lIns="0" rIns="0" tIns="0" bIns="0">
-            <a:spAutoFit/>
-          </a:bodyPr>
-          <a:lstStyle/>
-          <a:p>
-            <a:pPr algn="l"/>
-            <a:r>
-              <a:rPr sz="1000" b="1" i="0">
-                <a:solidFill>
-                  <a:srgbClr val="8F989D"/>
-                </a:solidFill>
-                <a:latin typeface="Calibri"/>
-              </a:rPr>
-              <a:t>Inicio 8:10 pm</a:t>
-            </a:r>
-          </a:p>
-        </p:txBody>
-      </p:sp>
-      <p:sp>
-        <p:nvSpPr>
-          <p:cNvPr id="6" name="TextBox 5"/>
-          <p:cNvSpPr txBox="1"/>
-          <p:nvPr/>
-        </p:nvSpPr>
-        <p:spPr>
-          <a:xfrm>
             <a:off x="11094415" y="6446520"/>
             <a:ext cx="548640" cy="274320"/>
           </a:xfrm>
@@ -8857,41 +8472,6 @@
       <p:sp>
         <p:nvSpPr>
           <p:cNvPr id="5" name="TextBox 4"/>
-          <p:cNvSpPr txBox="1"/>
-          <p:nvPr/>
-        </p:nvSpPr>
-        <p:spPr>
-          <a:xfrm>
-            <a:off x="2194560" y="6446520"/>
-            <a:ext cx="5943600" cy="274320"/>
-          </a:xfrm>
-          <a:prstGeom prst="rect">
-            <a:avLst/>
-          </a:prstGeom>
-          <a:noFill/>
-        </p:spPr>
-        <p:txBody>
-          <a:bodyPr wrap="square" anchor="t" lIns="0" rIns="0" tIns="0" bIns="0">
-            <a:spAutoFit/>
-          </a:bodyPr>
-          <a:lstStyle/>
-          <a:p>
-            <a:pPr algn="l"/>
-            <a:r>
-              <a:rPr sz="1000" b="1" i="0">
-                <a:solidFill>
-                  <a:srgbClr val="8F989D"/>
-                </a:solidFill>
-                <a:latin typeface="Calibri"/>
-              </a:rPr>
-              <a:t>Inicio 8:10 pm</a:t>
-            </a:r>
-          </a:p>
-        </p:txBody>
-      </p:sp>
-      <p:sp>
-        <p:nvSpPr>
-          <p:cNvPr id="6" name="TextBox 5"/>
           <p:cNvSpPr txBox="1"/>
           <p:nvPr/>
         </p:nvSpPr>
@@ -9635,41 +9215,6 @@
       <p:sp>
         <p:nvSpPr>
           <p:cNvPr id="6" name="TextBox 5"/>
-          <p:cNvSpPr txBox="1"/>
-          <p:nvPr/>
-        </p:nvSpPr>
-        <p:spPr>
-          <a:xfrm>
-            <a:off x="2194560" y="6446520"/>
-            <a:ext cx="5943600" cy="274320"/>
-          </a:xfrm>
-          <a:prstGeom prst="rect">
-            <a:avLst/>
-          </a:prstGeom>
-          <a:noFill/>
-        </p:spPr>
-        <p:txBody>
-          <a:bodyPr wrap="square" anchor="t" lIns="0" rIns="0" tIns="0" bIns="0">
-            <a:spAutoFit/>
-          </a:bodyPr>
-          <a:lstStyle/>
-          <a:p>
-            <a:pPr algn="l"/>
-            <a:r>
-              <a:rPr sz="1000" b="1" i="0">
-                <a:solidFill>
-                  <a:srgbClr val="8F989D"/>
-                </a:solidFill>
-                <a:latin typeface="Calibri"/>
-              </a:rPr>
-              <a:t>Inicio 8:10 pm</a:t>
-            </a:r>
-          </a:p>
-        </p:txBody>
-      </p:sp>
-      <p:sp>
-        <p:nvSpPr>
-          <p:cNvPr id="7" name="TextBox 6"/>
           <p:cNvSpPr txBox="1"/>
           <p:nvPr/>
         </p:nvSpPr>
@@ -10471,41 +10016,6 @@
         </p:nvSpPr>
         <p:spPr>
           <a:xfrm>
-            <a:off x="2194560" y="6446520"/>
-            <a:ext cx="5943600" cy="274320"/>
-          </a:xfrm>
-          <a:prstGeom prst="rect">
-            <a:avLst/>
-          </a:prstGeom>
-          <a:noFill/>
-        </p:spPr>
-        <p:txBody>
-          <a:bodyPr wrap="square" anchor="t" lIns="0" rIns="0" tIns="0" bIns="0">
-            <a:spAutoFit/>
-          </a:bodyPr>
-          <a:lstStyle/>
-          <a:p>
-            <a:pPr algn="l"/>
-            <a:r>
-              <a:rPr sz="1000" b="1" i="0">
-                <a:solidFill>
-                  <a:srgbClr val="8F989D"/>
-                </a:solidFill>
-                <a:latin typeface="Calibri"/>
-              </a:rPr>
-              <a:t>Inicio 8:10 pm</a:t>
-            </a:r>
-          </a:p>
-        </p:txBody>
-      </p:sp>
-      <p:sp>
-        <p:nvSpPr>
-          <p:cNvPr id="7" name="TextBox 6"/>
-          <p:cNvSpPr txBox="1"/>
-          <p:nvPr/>
-        </p:nvSpPr>
-        <p:spPr>
-          <a:xfrm>
             <a:off x="11094415" y="6446520"/>
             <a:ext cx="548640" cy="274320"/>
           </a:xfrm>
@@ -10957,41 +10467,6 @@
         </p:nvSpPr>
         <p:spPr>
           <a:xfrm>
-            <a:off x="2194560" y="6446520"/>
-            <a:ext cx="5943600" cy="274320"/>
-          </a:xfrm>
-          <a:prstGeom prst="rect">
-            <a:avLst/>
-          </a:prstGeom>
-          <a:noFill/>
-        </p:spPr>
-        <p:txBody>
-          <a:bodyPr wrap="square" anchor="t" lIns="0" rIns="0" tIns="0" bIns="0">
-            <a:spAutoFit/>
-          </a:bodyPr>
-          <a:lstStyle/>
-          <a:p>
-            <a:pPr algn="l"/>
-            <a:r>
-              <a:rPr sz="1000" b="1" i="0">
-                <a:solidFill>
-                  <a:srgbClr val="8F989D"/>
-                </a:solidFill>
-                <a:latin typeface="Calibri"/>
-              </a:rPr>
-              <a:t>Inicio 8:10 pm</a:t>
-            </a:r>
-          </a:p>
-        </p:txBody>
-      </p:sp>
-      <p:sp>
-        <p:nvSpPr>
-          <p:cNvPr id="6" name="TextBox 5"/>
-          <p:cNvSpPr txBox="1"/>
-          <p:nvPr/>
-        </p:nvSpPr>
-        <p:spPr>
-          <a:xfrm>
             <a:off x="11094415" y="6446520"/>
             <a:ext cx="548640" cy="274320"/>
           </a:xfrm>
@@ -11468,41 +10943,6 @@
         </p:nvSpPr>
         <p:spPr>
           <a:xfrm>
-            <a:off x="2194560" y="6446520"/>
-            <a:ext cx="5943600" cy="274320"/>
-          </a:xfrm>
-          <a:prstGeom prst="rect">
-            <a:avLst/>
-          </a:prstGeom>
-          <a:noFill/>
-        </p:spPr>
-        <p:txBody>
-          <a:bodyPr wrap="square" anchor="t" lIns="0" rIns="0" tIns="0" bIns="0">
-            <a:spAutoFit/>
-          </a:bodyPr>
-          <a:lstStyle/>
-          <a:p>
-            <a:pPr algn="l"/>
-            <a:r>
-              <a:rPr sz="1000" b="1" i="0">
-                <a:solidFill>
-                  <a:srgbClr val="8F989D"/>
-                </a:solidFill>
-                <a:latin typeface="Calibri"/>
-              </a:rPr>
-              <a:t>Inicio 8:10 pm</a:t>
-            </a:r>
-          </a:p>
-        </p:txBody>
-      </p:sp>
-      <p:sp>
-        <p:nvSpPr>
-          <p:cNvPr id="11" name="TextBox 10"/>
-          <p:cNvSpPr txBox="1"/>
-          <p:nvPr/>
-        </p:nvSpPr>
-        <p:spPr>
-          <a:xfrm>
             <a:off x="11094415" y="6446520"/>
             <a:ext cx="548640" cy="274320"/>
           </a:xfrm>
@@ -11985,41 +11425,6 @@
       <p:sp>
         <p:nvSpPr>
           <p:cNvPr id="5" name="TextBox 4"/>
-          <p:cNvSpPr txBox="1"/>
-          <p:nvPr/>
-        </p:nvSpPr>
-        <p:spPr>
-          <a:xfrm>
-            <a:off x="2194560" y="6446520"/>
-            <a:ext cx="5943600" cy="274320"/>
-          </a:xfrm>
-          <a:prstGeom prst="rect">
-            <a:avLst/>
-          </a:prstGeom>
-          <a:noFill/>
-        </p:spPr>
-        <p:txBody>
-          <a:bodyPr wrap="square" anchor="t" lIns="0" rIns="0" tIns="0" bIns="0">
-            <a:spAutoFit/>
-          </a:bodyPr>
-          <a:lstStyle/>
-          <a:p>
-            <a:pPr algn="l"/>
-            <a:r>
-              <a:rPr sz="1000" b="1" i="0">
-                <a:solidFill>
-                  <a:srgbClr val="8F989D"/>
-                </a:solidFill>
-                <a:latin typeface="Calibri"/>
-              </a:rPr>
-              <a:t>Inicio 8:10 pm</a:t>
-            </a:r>
-          </a:p>
-        </p:txBody>
-      </p:sp>
-      <p:sp>
-        <p:nvSpPr>
-          <p:cNvPr id="6" name="TextBox 5"/>
           <p:cNvSpPr txBox="1"/>
           <p:nvPr/>
         </p:nvSpPr>
@@ -12930,41 +12335,6 @@
         </p:nvSpPr>
         <p:spPr>
           <a:xfrm>
-            <a:off x="2194560" y="6446520"/>
-            <a:ext cx="5943600" cy="274320"/>
-          </a:xfrm>
-          <a:prstGeom prst="rect">
-            <a:avLst/>
-          </a:prstGeom>
-          <a:noFill/>
-        </p:spPr>
-        <p:txBody>
-          <a:bodyPr wrap="square" anchor="t" lIns="0" rIns="0" tIns="0" bIns="0">
-            <a:spAutoFit/>
-          </a:bodyPr>
-          <a:lstStyle/>
-          <a:p>
-            <a:pPr algn="l"/>
-            <a:r>
-              <a:rPr sz="1000" b="1" i="0">
-                <a:solidFill>
-                  <a:srgbClr val="8F989D"/>
-                </a:solidFill>
-                <a:latin typeface="Calibri"/>
-              </a:rPr>
-              <a:t>Inicio 8:10 pm</a:t>
-            </a:r>
-          </a:p>
-        </p:txBody>
-      </p:sp>
-      <p:sp>
-        <p:nvSpPr>
-          <p:cNvPr id="7" name="TextBox 6"/>
-          <p:cNvSpPr txBox="1"/>
-          <p:nvPr/>
-        </p:nvSpPr>
-        <p:spPr>
-          <a:xfrm>
             <a:off x="11094415" y="6446520"/>
             <a:ext cx="548640" cy="274320"/>
           </a:xfrm>

--- a/Especializacion/Proyecto I/Clases/Sesion 07 - Marco legal · citación APA 7/Presentacion.pptx
+++ b/Especializacion/Proyecto I/Clases/Sesion 07 - Marco legal · citación APA 7/Presentacion.pptx
@@ -23,6 +23,8 @@
     <p:sldId id="271" r:id="rId22"/>
     <p:sldId id="272" r:id="rId23"/>
     <p:sldId id="273" r:id="rId24"/>
+    <p:sldId id="274" r:id="rId25"/>
+    <p:sldId id="275" r:id="rId26"/>
   </p:sldIdLst>
   <p:sldSz cx="12191695" cy="6858000" type="screen4x3"/>
   <p:notesSz cx="6858000" cy="9144000"/>
@@ -6175,7 +6177,7 @@
                 </a:solidFill>
                 <a:latin typeface="Calibri"/>
               </a:rPr>
-              <a:t>TALLER · Limpieza legal y bibliográfica (20 minutos)</a:t>
+              <a:t>TALLER · Limpieza legal y bibliográfica</a:t>
             </a:r>
           </a:p>
         </p:txBody>
@@ -6188,8 +6190,8 @@
         </p:nvSpPr>
         <p:spPr>
           <a:xfrm>
-            <a:off x="640080" y="1691639"/>
-            <a:ext cx="10911535" cy="4617720"/>
+            <a:off x="640080" y="1280160"/>
+            <a:ext cx="10911535" cy="411480"/>
           </a:xfrm>
           <a:prstGeom prst="rect">
             <a:avLst/>
@@ -6202,6 +6204,41 @@
           </a:bodyPr>
           <a:lstStyle/>
           <a:p>
+            <a:pPr algn="ctr"/>
+            <a:r>
+              <a:rPr sz="1500" b="0" i="0">
+                <a:solidFill>
+                  <a:srgbClr val="2B2B2B"/>
+                </a:solidFill>
+                <a:latin typeface="Calibri"/>
+              </a:rPr>
+              <a:t>Por equipos, con el documento de avance abierto en Google Docs · el Docente circula</a:t>
+            </a:r>
+          </a:p>
+        </p:txBody>
+      </p:sp>
+      <p:sp>
+        <p:nvSpPr>
+          <p:cNvPr id="5" name="TextBox 4"/>
+          <p:cNvSpPr txBox="1"/>
+          <p:nvPr/>
+        </p:nvSpPr>
+        <p:spPr>
+          <a:xfrm>
+            <a:off x="640080" y="2011679"/>
+            <a:ext cx="10911535" cy="4297680"/>
+          </a:xfrm>
+          <a:prstGeom prst="rect">
+            <a:avLst/>
+          </a:prstGeom>
+          <a:noFill/>
+        </p:spPr>
+        <p:txBody>
+          <a:bodyPr wrap="square" anchor="t" lIns="0" rIns="0" tIns="0" bIns="0">
+            <a:spAutoFit/>
+          </a:bodyPr>
+          <a:lstStyle/>
+          <a:p>
             <a:pPr>
               <a:spcAft>
                 <a:spcPts val="1000"/>
@@ -6223,7 +6260,7 @@
                 </a:solidFill>
                 <a:latin typeface="Calibri"/>
               </a:rPr>
-              <a:t>Consigna literal</a:t>
+              <a:t>Al final tiene:</a:t>
             </a:r>
             <a:r>
               <a:rPr sz="1600" b="0" i="0">
@@ -6232,215 +6269,7 @@
                 </a:solidFill>
                 <a:latin typeface="Calibri"/>
               </a:rPr>
-              <a:t>, con su documento de avance abierto en Google Docs:</a:t>
-            </a:r>
-          </a:p>
-          <a:p>
-            <a:pPr lvl="1">
-              <a:spcAft>
-                <a:spcPts val="600"/>
-              </a:spcAft>
-            </a:pPr>
-            <a:r>
-              <a:rPr sz="1500" b="0" i="0">
-                <a:solidFill>
-                  <a:srgbClr val="2B2B2B"/>
-                </a:solidFill>
-                <a:latin typeface="Calibri"/>
-              </a:rPr>
-              <a:t>●   </a:t>
-            </a:r>
-            <a:r>
-              <a:rPr sz="1500" b="1" i="0">
-                <a:solidFill>
-                  <a:srgbClr val="2B2B2B"/>
-                </a:solidFill>
-                <a:latin typeface="Calibri"/>
-              </a:rPr>
-              <a:t>(a)</a:t>
-            </a:r>
-            <a:r>
-              <a:rPr sz="1500" b="0" i="0">
-                <a:solidFill>
-                  <a:srgbClr val="2B2B2B"/>
-                </a:solidFill>
-                <a:latin typeface="Calibri"/>
-              </a:rPr>
-              <a:t> Decida si aplica marco legal y escriba </a:t>
-            </a:r>
-            <a:r>
-              <a:rPr sz="1500" b="1" i="0">
-                <a:solidFill>
-                  <a:srgbClr val="2B2B2B"/>
-                </a:solidFill>
-                <a:latin typeface="Calibri"/>
-              </a:rPr>
-              <a:t>un párrafo con la fórmula de tres tiempos</a:t>
-            </a:r>
-            <a:r>
-              <a:rPr sz="1500" b="0" i="0">
-                <a:solidFill>
-                  <a:srgbClr val="2B2B2B"/>
-                </a:solidFill>
-                <a:latin typeface="Calibri"/>
-              </a:rPr>
-              <a:t> — norma, principio pertinente, implicación para su estudio.</a:t>
-            </a:r>
-          </a:p>
-          <a:p>
-            <a:pPr lvl="1">
-              <a:spcAft>
-                <a:spcPts val="600"/>
-              </a:spcAft>
-            </a:pPr>
-            <a:r>
-              <a:rPr sz="1500" b="0" i="0">
-                <a:solidFill>
-                  <a:srgbClr val="2B2B2B"/>
-                </a:solidFill>
-                <a:latin typeface="Calibri"/>
-              </a:rPr>
-              <a:t>●   </a:t>
-            </a:r>
-            <a:r>
-              <a:rPr sz="1500" b="1" i="0">
-                <a:solidFill>
-                  <a:srgbClr val="2B2B2B"/>
-                </a:solidFill>
-                <a:latin typeface="Calibri"/>
-              </a:rPr>
-              <a:t>(b)</a:t>
-            </a:r>
-            <a:r>
-              <a:rPr sz="1500" b="0" i="0">
-                <a:solidFill>
-                  <a:srgbClr val="2B2B2B"/>
-                </a:solidFill>
-                <a:latin typeface="Calibri"/>
-              </a:rPr>
-              <a:t> Si no aplica, escriba la </a:t>
-            </a:r>
-            <a:r>
-              <a:rPr sz="1500" b="1" i="0">
-                <a:solidFill>
-                  <a:srgbClr val="2B2B2B"/>
-                </a:solidFill>
-                <a:latin typeface="Calibri"/>
-              </a:rPr>
-              <a:t>declaración argumentada de no aplicabilidad</a:t>
-            </a:r>
-            <a:r>
-              <a:rPr sz="1500" b="0" i="0">
-                <a:solidFill>
-                  <a:srgbClr val="2B2B2B"/>
-                </a:solidFill>
-                <a:latin typeface="Calibri"/>
-              </a:rPr>
-              <a:t> (mínimo dos renglones, con razón explícita).</a:t>
-            </a:r>
-          </a:p>
-          <a:p>
-            <a:pPr lvl="1">
-              <a:spcAft>
-                <a:spcPts val="600"/>
-              </a:spcAft>
-            </a:pPr>
-            <a:r>
-              <a:rPr sz="1500" b="0" i="0">
-                <a:solidFill>
-                  <a:srgbClr val="2B2B2B"/>
-                </a:solidFill>
-                <a:latin typeface="Calibri"/>
-              </a:rPr>
-              <a:t>●   </a:t>
-            </a:r>
-            <a:r>
-              <a:rPr sz="1500" b="1" i="0">
-                <a:solidFill>
-                  <a:srgbClr val="2B2B2B"/>
-                </a:solidFill>
-                <a:latin typeface="Calibri"/>
-              </a:rPr>
-              <a:t>(c)</a:t>
-            </a:r>
-            <a:r>
-              <a:rPr sz="1500" b="0" i="0">
-                <a:solidFill>
-                  <a:srgbClr val="2B2B2B"/>
-                </a:solidFill>
-                <a:latin typeface="Calibri"/>
-              </a:rPr>
-              <a:t> Regenere </a:t>
-            </a:r>
-            <a:r>
-              <a:rPr sz="1500" b="1" i="0">
-                <a:solidFill>
-                  <a:srgbClr val="2B2B2B"/>
-                </a:solidFill>
-                <a:latin typeface="Calibri"/>
-              </a:rPr>
-              <a:t>todas</a:t>
-            </a:r>
-            <a:r>
-              <a:rPr sz="1500" b="0" i="0">
-                <a:solidFill>
-                  <a:srgbClr val="2B2B2B"/>
-                </a:solidFill>
-                <a:latin typeface="Calibri"/>
-              </a:rPr>
-              <a:t> sus referencias en ZoteroBib con estilo APA 7 y aplique sangría francesa.</a:t>
-            </a:r>
-          </a:p>
-          <a:p>
-            <a:pPr lvl="1">
-              <a:spcAft>
-                <a:spcPts val="600"/>
-              </a:spcAft>
-            </a:pPr>
-            <a:r>
-              <a:rPr sz="1500" b="0" i="0">
-                <a:solidFill>
-                  <a:srgbClr val="2B2B2B"/>
-                </a:solidFill>
-                <a:latin typeface="Calibri"/>
-              </a:rPr>
-              <a:t>●   </a:t>
-            </a:r>
-            <a:r>
-              <a:rPr sz="1500" b="1" i="0">
-                <a:solidFill>
-                  <a:srgbClr val="2B2B2B"/>
-                </a:solidFill>
-                <a:latin typeface="Calibri"/>
-              </a:rPr>
-              <a:t>(d)</a:t>
-            </a:r>
-            <a:r>
-              <a:rPr sz="1500" b="0" i="0">
-                <a:solidFill>
-                  <a:srgbClr val="2B2B2B"/>
-                </a:solidFill>
-                <a:latin typeface="Calibri"/>
-              </a:rPr>
-              <a:t> Haga la </a:t>
-            </a:r>
-            <a:r>
-              <a:rPr sz="1500" b="1" i="0">
-                <a:solidFill>
-                  <a:srgbClr val="2B2B2B"/>
-                </a:solidFill>
-                <a:latin typeface="Calibri"/>
-              </a:rPr>
-              <a:t>verificación cruzada</a:t>
-            </a:r>
-            <a:r>
-              <a:rPr sz="1500" b="0" i="0">
-                <a:solidFill>
-                  <a:srgbClr val="2B2B2B"/>
-                </a:solidFill>
-                <a:latin typeface="Calibri"/>
-              </a:rPr>
-              <a:t> con Ctrl + F: marque en amarillo toda referencia que no encuentre en el cuerpo.</a:t>
+              <a:t> el párrafo legal (o la declaración de no aplicabilidad) y todas las referencias verificadas.</a:t>
             </a:r>
           </a:p>
           <a:p>
@@ -6465,7 +6294,7 @@
                 </a:solidFill>
                 <a:latin typeface="Calibri"/>
               </a:rPr>
-              <a:t>Criterio de éxito verificable:</a:t>
+              <a:t>Paso 1</a:t>
             </a:r>
             <a:r>
               <a:rPr sz="1600" b="0" i="0">
@@ -6474,7 +6303,25 @@
                 </a:solidFill>
                 <a:latin typeface="Calibri"/>
               </a:rPr>
-              <a:t> cero resaltados en amarillo al terminar y el párrafo legal con la implicación redactada en condicional.</a:t>
+              <a:t> · Decida si aplica marco legal y escriba </a:t>
+            </a:r>
+            <a:r>
+              <a:rPr sz="1600" b="1" i="0">
+                <a:solidFill>
+                  <a:srgbClr val="2B2B2B"/>
+                </a:solidFill>
+                <a:latin typeface="Calibri"/>
+              </a:rPr>
+              <a:t>un párrafo con la fórmula de tres tiempos</a:t>
+            </a:r>
+            <a:r>
+              <a:rPr sz="1600" b="0" i="0">
+                <a:solidFill>
+                  <a:srgbClr val="2B2B2B"/>
+                </a:solidFill>
+                <a:latin typeface="Calibri"/>
+              </a:rPr>
+              <a:t> — norma, principio pertinente, implicación para su estudio.</a:t>
             </a:r>
           </a:p>
           <a:p>
@@ -6490,7 +6337,61 @@
                 </a:solidFill>
                 <a:latin typeface="Calibri"/>
               </a:rPr>
-              <a:t>–   El Docente circula por los equipos durante el taller; levante la mano cuando llegue a la parte (d).</a:t>
+              <a:t>–   </a:t>
+            </a:r>
+            <a:r>
+              <a:rPr sz="1600" b="1" i="0">
+                <a:solidFill>
+                  <a:srgbClr val="2B2B2B"/>
+                </a:solidFill>
+                <a:latin typeface="Calibri"/>
+              </a:rPr>
+              <a:t>Paso 2</a:t>
+            </a:r>
+            <a:r>
+              <a:rPr sz="1600" b="0" i="0">
+                <a:solidFill>
+                  <a:srgbClr val="2B2B2B"/>
+                </a:solidFill>
+                <a:latin typeface="Calibri"/>
+              </a:rPr>
+              <a:t> · Si </a:t>
+            </a:r>
+            <a:r>
+              <a:rPr sz="1600" b="1" i="0">
+                <a:solidFill>
+                  <a:srgbClr val="2B2B2B"/>
+                </a:solidFill>
+                <a:latin typeface="Calibri"/>
+              </a:rPr>
+              <a:t>no</a:t>
+            </a:r>
+            <a:r>
+              <a:rPr sz="1600" b="0" i="0">
+                <a:solidFill>
+                  <a:srgbClr val="2B2B2B"/>
+                </a:solidFill>
+                <a:latin typeface="Calibri"/>
+              </a:rPr>
+              <a:t> aplica, escriba la </a:t>
+            </a:r>
+            <a:r>
+              <a:rPr sz="1600" b="1" i="0">
+                <a:solidFill>
+                  <a:srgbClr val="2B2B2B"/>
+                </a:solidFill>
+                <a:latin typeface="Calibri"/>
+              </a:rPr>
+              <a:t>declaración argumentada de no aplicabilidad</a:t>
+            </a:r>
+            <a:r>
+              <a:rPr sz="1600" b="0" i="0">
+                <a:solidFill>
+                  <a:srgbClr val="2B2B2B"/>
+                </a:solidFill>
+                <a:latin typeface="Calibri"/>
+              </a:rPr>
+              <a:t>: mínimo dos renglones, con razón explícita.</a:t>
             </a:r>
           </a:p>
           <a:p>
@@ -6515,7 +6416,7 @@
                 </a:solidFill>
                 <a:latin typeface="Calibri"/>
               </a:rPr>
-              <a:t>Entrega:</a:t>
+              <a:t>Paso 3</a:t>
             </a:r>
             <a:r>
               <a:rPr sz="1600" b="0" i="0">
@@ -6524,7 +6425,25 @@
                 </a:solidFill>
                 <a:latin typeface="Calibri"/>
               </a:rPr>
-              <a:t> suba el archivo como `S07_LegalAPA_Apellidos` en [URL CDigital — campus del curso pendiente].</a:t>
+              <a:t> · Regenere </a:t>
+            </a:r>
+            <a:r>
+              <a:rPr sz="1600" b="1" i="0">
+                <a:solidFill>
+                  <a:srgbClr val="2B2B2B"/>
+                </a:solidFill>
+                <a:latin typeface="Calibri"/>
+              </a:rPr>
+              <a:t>todas</a:t>
+            </a:r>
+            <a:r>
+              <a:rPr sz="1600" b="0" i="0">
+                <a:solidFill>
+                  <a:srgbClr val="2B2B2B"/>
+                </a:solidFill>
+                <a:latin typeface="Calibri"/>
+              </a:rPr>
+              <a:t> sus referencias en ZoteroBib con estilo APA 7 y aplique sangría francesa.</a:t>
             </a:r>
           </a:p>
           <a:p>
@@ -6540,14 +6459,102 @@
                 </a:solidFill>
                 <a:latin typeface="Calibri"/>
               </a:rPr>
-              <a:t>–   Con esto queda cerrado el bloque referencial: antecedentes, teórico, conceptual, contextual y legal.</a:t>
-            </a:r>
-          </a:p>
-        </p:txBody>
-      </p:sp>
-      <p:sp>
-        <p:nvSpPr>
-          <p:cNvPr id="5" name="TextBox 4"/>
+              <a:t>–   </a:t>
+            </a:r>
+            <a:r>
+              <a:rPr sz="1600" b="1" i="0">
+                <a:solidFill>
+                  <a:srgbClr val="2B2B2B"/>
+                </a:solidFill>
+                <a:latin typeface="Calibri"/>
+              </a:rPr>
+              <a:t>Paso 4</a:t>
+            </a:r>
+            <a:r>
+              <a:rPr sz="1600" b="0" i="0">
+                <a:solidFill>
+                  <a:srgbClr val="2B2B2B"/>
+                </a:solidFill>
+                <a:latin typeface="Calibri"/>
+              </a:rPr>
+              <a:t> · Haga la </a:t>
+            </a:r>
+            <a:r>
+              <a:rPr sz="1600" b="1" i="0">
+                <a:solidFill>
+                  <a:srgbClr val="2B2B2B"/>
+                </a:solidFill>
+                <a:latin typeface="Calibri"/>
+              </a:rPr>
+              <a:t>verificación cruzada</a:t>
+            </a:r>
+            <a:r>
+              <a:rPr sz="1600" b="0" i="0">
+                <a:solidFill>
+                  <a:srgbClr val="2B2B2B"/>
+                </a:solidFill>
+                <a:latin typeface="Calibri"/>
+              </a:rPr>
+              <a:t> con Ctrl + F: marque en amarillo toda referencia que no encuentre en el cuerpo. Levante la mano cuando llegue aquí.</a:t>
+            </a:r>
+          </a:p>
+          <a:p>
+            <a:pPr>
+              <a:spcAft>
+                <a:spcPts val="1000"/>
+              </a:spcAft>
+            </a:pPr>
+            <a:r>
+              <a:rPr sz="1600" b="0" i="0">
+                <a:solidFill>
+                  <a:srgbClr val="2B2B2B"/>
+                </a:solidFill>
+                <a:latin typeface="Calibri"/>
+              </a:rPr>
+              <a:t>–   </a:t>
+            </a:r>
+            <a:r>
+              <a:rPr sz="1600" b="1" i="0">
+                <a:solidFill>
+                  <a:srgbClr val="2B2B2B"/>
+                </a:solidFill>
+                <a:latin typeface="Calibri"/>
+              </a:rPr>
+              <a:t>En clase, sin falta:</a:t>
+            </a:r>
+            <a:r>
+              <a:rPr sz="1600" b="0" i="0">
+                <a:solidFill>
+                  <a:srgbClr val="2B2B2B"/>
+                </a:solidFill>
+                <a:latin typeface="Calibri"/>
+              </a:rPr>
+              <a:t> los </a:t>
+            </a:r>
+            <a:r>
+              <a:rPr sz="1600" b="1" i="0">
+                <a:solidFill>
+                  <a:srgbClr val="2B2B2B"/>
+                </a:solidFill>
+                <a:latin typeface="Calibri"/>
+              </a:rPr>
+              <a:t>4 pasos</a:t>
+            </a:r>
+            <a:r>
+              <a:rPr sz="1600" b="0" i="0">
+                <a:solidFill>
+                  <a:srgbClr val="2B2B2B"/>
+                </a:solidFill>
+                <a:latin typeface="Calibri"/>
+              </a:rPr>
+              <a:t>. Lo que no alcance, ciérrelo hoy mismo en autónomo.</a:t>
+            </a:r>
+          </a:p>
+        </p:txBody>
+      </p:sp>
+      <p:sp>
+        <p:nvSpPr>
+          <p:cNvPr id="6" name="TextBox 5"/>
           <p:cNvSpPr txBox="1"/>
           <p:nvPr/>
         </p:nvSpPr>
@@ -6576,6 +6583,40 @@
                 <a:latin typeface="Calibri"/>
               </a:rPr>
               <a:t>15</a:t>
+            </a:r>
+          </a:p>
+        </p:txBody>
+      </p:sp>
+      <p:sp>
+        <p:nvSpPr>
+          <p:cNvPr id="7" name="TextBox 6"/>
+          <p:cNvSpPr txBox="1"/>
+          <p:nvPr/>
+        </p:nvSpPr>
+        <p:spPr>
+          <a:xfrm>
+            <a:off x="640080" y="5943600"/>
+            <a:ext cx="9997135" cy="457200"/>
+          </a:xfrm>
+          <a:prstGeom prst="rect">
+            <a:avLst/>
+          </a:prstGeom>
+          <a:noFill/>
+        </p:spPr>
+        <p:txBody>
+          <a:bodyPr wrap="square" anchor="t" lIns="0" rIns="0" tIns="0" bIns="0">
+            <a:spAutoFit/>
+          </a:bodyPr>
+          <a:lstStyle/>
+          <a:p>
+            <a:r>
+              <a:rPr sz="1200" b="0" i="1">
+                <a:solidFill>
+                  <a:srgbClr val="2B2B2B"/>
+                </a:solidFill>
+                <a:latin typeface="Calibri"/>
+              </a:rPr>
+              <a:t>Con esto queda cerrado el bloque referencial: antecedentes, teórico, conceptual, contextual y legal.</a:t>
             </a:r>
           </a:p>
         </p:txBody>
@@ -6680,7 +6721,7 @@
                 </a:solidFill>
                 <a:latin typeface="Calibri"/>
               </a:rPr>
-              <a:t>Checklist de autoevaluación antes de entregar</a:t>
+              <a:t>TALLER · cómo se revisa y dónde se entrega</a:t>
             </a:r>
           </a:p>
         </p:txBody>
@@ -6693,8 +6734,8 @@
         </p:nvSpPr>
         <p:spPr>
           <a:xfrm>
-            <a:off x="640080" y="1691639"/>
-            <a:ext cx="10911535" cy="4617720"/>
+            <a:off x="640080" y="1280160"/>
+            <a:ext cx="10911535" cy="411480"/>
           </a:xfrm>
           <a:prstGeom prst="rect">
             <a:avLst/>
@@ -6707,6 +6748,41 @@
           </a:bodyPr>
           <a:lstStyle/>
           <a:p>
+            <a:pPr algn="ctr"/>
+            <a:r>
+              <a:rPr sz="1500" b="0" i="0">
+                <a:solidFill>
+                  <a:srgbClr val="2B2B2B"/>
+                </a:solidFill>
+                <a:latin typeface="Calibri"/>
+              </a:rPr>
+              <a:t>Limpieza legal y bibliográfica</a:t>
+            </a:r>
+          </a:p>
+        </p:txBody>
+      </p:sp>
+      <p:sp>
+        <p:nvSpPr>
+          <p:cNvPr id="5" name="TextBox 4"/>
+          <p:cNvSpPr txBox="1"/>
+          <p:nvPr/>
+        </p:nvSpPr>
+        <p:spPr>
+          <a:xfrm>
+            <a:off x="640080" y="2011679"/>
+            <a:ext cx="10911535" cy="4297680"/>
+          </a:xfrm>
+          <a:prstGeom prst="rect">
+            <a:avLst/>
+          </a:prstGeom>
+          <a:noFill/>
+        </p:spPr>
+        <p:txBody>
+          <a:bodyPr wrap="square" anchor="t" lIns="0" rIns="0" tIns="0" bIns="0">
+            <a:spAutoFit/>
+          </a:bodyPr>
+          <a:lstStyle/>
+          <a:p>
             <a:pPr>
               <a:spcAft>
                 <a:spcPts val="1000"/>
@@ -6719,7 +6795,25 @@
                 </a:solidFill>
                 <a:latin typeface="Calibri"/>
               </a:rPr>
-              <a:t>–   Marque cada casilla sobre su propio documento. Si alguna falla, todavía está a tiempo.</a:t>
+              <a:t>–   </a:t>
+            </a:r>
+            <a:r>
+              <a:rPr sz="1600" b="1" i="0">
+                <a:solidFill>
+                  <a:srgbClr val="2B2B2B"/>
+                </a:solidFill>
+                <a:latin typeface="Calibri"/>
+              </a:rPr>
+              <a:t>Quedó bien si</a:t>
+            </a:r>
+            <a:r>
+              <a:rPr sz="1600" b="0" i="0">
+                <a:solidFill>
+                  <a:srgbClr val="2B2B2B"/>
+                </a:solidFill>
+                <a:latin typeface="Calibri"/>
+              </a:rPr>
+              <a:t> —compruébelo usted antes de cerrar el documento—:</a:t>
             </a:r>
           </a:p>
           <a:p>
@@ -6735,7 +6829,25 @@
                 </a:solidFill>
                 <a:latin typeface="Calibri"/>
               </a:rPr>
-              <a:t>●   Toda cita del cuerpo tiene su referencia completa en la lista final.</a:t>
+              <a:t>●   </a:t>
+            </a:r>
+            <a:r>
+              <a:rPr sz="1500" b="1" i="0">
+                <a:solidFill>
+                  <a:srgbClr val="2B2B2B"/>
+                </a:solidFill>
+                <a:latin typeface="Calibri"/>
+              </a:rPr>
+              <a:t>Cero resaltados en amarillo</a:t>
+            </a:r>
+            <a:r>
+              <a:rPr sz="1500" b="0" i="0">
+                <a:solidFill>
+                  <a:srgbClr val="2B2B2B"/>
+                </a:solidFill>
+                <a:latin typeface="Calibri"/>
+              </a:rPr>
+              <a:t> al terminar.</a:t>
             </a:r>
           </a:p>
           <a:p>
@@ -6751,7 +6863,7 @@
                 </a:solidFill>
                 <a:latin typeface="Calibri"/>
               </a:rPr>
-              <a:t>●   Toda referencia de la lista aparece citada </a:t>
+              <a:t>●   El párrafo legal tiene la implicación redactada </a:t>
             </a:r>
             <a:r>
               <a:rPr sz="1500" b="1" i="0">
@@ -6760,7 +6872,7 @@
                 </a:solidFill>
                 <a:latin typeface="Calibri"/>
               </a:rPr>
-              <a:t>al menos una vez</a:t>
+              <a:t>en condicional</a:t>
             </a:r>
             <a:r>
               <a:rPr sz="1500" b="0" i="0">
@@ -6769,218 +6881,152 @@
                 </a:solidFill>
                 <a:latin typeface="Calibri"/>
               </a:rPr>
-              <a:t> en el cuerpo.</a:t>
-            </a:r>
-          </a:p>
-          <a:p>
-            <a:pPr lvl="1">
+              <a:t>.</a:t>
+            </a:r>
+          </a:p>
+          <a:p>
+            <a:pPr>
               <a:spcAft>
-                <a:spcPts val="600"/>
+                <a:spcPts val="1000"/>
               </a:spcAft>
             </a:pPr>
             <a:r>
-              <a:rPr sz="1500" b="0" i="0">
-                <a:solidFill>
-                  <a:srgbClr val="2B2B2B"/>
-                </a:solidFill>
-                <a:latin typeface="Calibri"/>
-              </a:rPr>
-              <a:t>●   La lista está en </a:t>
-            </a:r>
-            <a:r>
-              <a:rPr sz="1500" b="1" i="0">
-                <a:solidFill>
-                  <a:srgbClr val="2B2B2B"/>
-                </a:solidFill>
-                <a:latin typeface="Calibri"/>
-              </a:rPr>
-              <a:t>orden alfabético</a:t>
-            </a:r>
-            <a:r>
-              <a:rPr sz="1500" b="0" i="0">
-                <a:solidFill>
-                  <a:srgbClr val="2B2B2B"/>
-                </a:solidFill>
-                <a:latin typeface="Calibri"/>
-              </a:rPr>
-              <a:t> y con </a:t>
-            </a:r>
-            <a:r>
-              <a:rPr sz="1500" b="1" i="0">
-                <a:solidFill>
-                  <a:srgbClr val="2B2B2B"/>
-                </a:solidFill>
-                <a:latin typeface="Calibri"/>
-              </a:rPr>
-              <a:t>sangría francesa</a:t>
-            </a:r>
-            <a:r>
-              <a:rPr sz="1500" b="0" i="0">
-                <a:solidFill>
-                  <a:srgbClr val="2B2B2B"/>
-                </a:solidFill>
-                <a:latin typeface="Calibri"/>
-              </a:rPr>
-              <a:t> de 1,27 cm.</a:t>
-            </a:r>
-          </a:p>
-          <a:p>
-            <a:pPr lvl="1">
+              <a:rPr sz="1600" b="0" i="0">
+                <a:solidFill>
+                  <a:srgbClr val="2B2B2B"/>
+                </a:solidFill>
+                <a:latin typeface="Calibri"/>
+              </a:rPr>
+              <a:t>–   </a:t>
+            </a:r>
+            <a:r>
+              <a:rPr sz="1600" b="1" i="0">
+                <a:solidFill>
+                  <a:srgbClr val="2B2B2B"/>
+                </a:solidFill>
+                <a:latin typeface="Calibri"/>
+              </a:rPr>
+              <a:t>Plan B:</a:t>
+            </a:r>
+            <a:r>
+              <a:rPr sz="1600" b="0" i="0">
+                <a:solidFill>
+                  <a:srgbClr val="2B2B2B"/>
+                </a:solidFill>
+                <a:latin typeface="Calibri"/>
+              </a:rPr>
+              <a:t> Si no sabe si su proyecto tiene marco legal, escriba la declaración de no aplicabilidad: una razón explícita vale más que una norma pegada que no lo toca.</a:t>
+            </a:r>
+          </a:p>
+          <a:p>
+            <a:pPr>
               <a:spcAft>
-                <a:spcPts val="600"/>
+                <a:spcPts val="1000"/>
               </a:spcAft>
             </a:pPr>
             <a:r>
-              <a:rPr sz="1500" b="0" i="0">
-                <a:solidFill>
-                  <a:srgbClr val="2B2B2B"/>
-                </a:solidFill>
-                <a:latin typeface="Calibri"/>
-              </a:rPr>
-              <a:t>●   Las fuentes que tienen </a:t>
-            </a:r>
-            <a:r>
-              <a:rPr sz="1500" b="1" i="0">
-                <a:solidFill>
-                  <a:srgbClr val="2B2B2B"/>
-                </a:solidFill>
-                <a:latin typeface="Calibri"/>
-              </a:rPr>
-              <a:t>DOI</a:t>
-            </a:r>
-            <a:r>
-              <a:rPr sz="1500" b="0" i="0">
-                <a:solidFill>
-                  <a:srgbClr val="2B2B2B"/>
-                </a:solidFill>
-                <a:latin typeface="Calibri"/>
-              </a:rPr>
-              <a:t> lo muestran en formato `https://doi.org/...`.</a:t>
-            </a:r>
-          </a:p>
-          <a:p>
-            <a:pPr lvl="1">
+              <a:rPr sz="1600" b="0" i="0">
+                <a:solidFill>
+                  <a:srgbClr val="2B2B2B"/>
+                </a:solidFill>
+                <a:latin typeface="Calibri"/>
+              </a:rPr>
+              <a:t>–   </a:t>
+            </a:r>
+            <a:r>
+              <a:rPr sz="1600" b="1" i="0">
+                <a:solidFill>
+                  <a:srgbClr val="2B2B2B"/>
+                </a:solidFill>
+                <a:latin typeface="Calibri"/>
+              </a:rPr>
+              <a:t>Entrega:</a:t>
+            </a:r>
+            <a:r>
+              <a:rPr sz="1600" b="0" i="0">
+                <a:solidFill>
+                  <a:srgbClr val="2B2B2B"/>
+                </a:solidFill>
+                <a:latin typeface="Calibri"/>
+              </a:rPr>
+              <a:t> suba `S07_LegalAPA_Apellidos` (Google Doc o PDF) como </a:t>
+            </a:r>
+            <a:r>
+              <a:rPr sz="1600" b="1" i="0">
+                <a:solidFill>
+                  <a:srgbClr val="2B2B2B"/>
+                </a:solidFill>
+                <a:latin typeface="Calibri"/>
+              </a:rPr>
+              <a:t>ACA 1</a:t>
+            </a:r>
+            <a:r>
+              <a:rPr sz="1600" b="0" i="0">
+                <a:solidFill>
+                  <a:srgbClr val="2B2B2B"/>
+                </a:solidFill>
+                <a:latin typeface="Calibri"/>
+              </a:rPr>
+              <a:t> —tarea, 25%— en </a:t>
+            </a:r>
+            <a:r>
+              <a:rPr sz="1600" b="1" i="0">
+                <a:solidFill>
+                  <a:srgbClr val="2B2B2B"/>
+                </a:solidFill>
+                <a:latin typeface="Calibri"/>
+              </a:rPr>
+              <a:t>CDigital</a:t>
+            </a:r>
+            <a:r>
+              <a:rPr sz="1600" b="0" i="0">
+                <a:solidFill>
+                  <a:srgbClr val="2B2B2B"/>
+                </a:solidFill>
+                <a:latin typeface="Calibri"/>
+              </a:rPr>
+              <a:t>.</a:t>
+            </a:r>
+          </a:p>
+          <a:p>
+            <a:pPr>
               <a:spcAft>
-                <a:spcPts val="600"/>
+                <a:spcPts val="1000"/>
               </a:spcAft>
             </a:pPr>
             <a:r>
-              <a:rPr sz="1500" b="0" i="0">
-                <a:solidFill>
-                  <a:srgbClr val="2B2B2B"/>
-                </a:solidFill>
-                <a:latin typeface="Calibri"/>
-              </a:rPr>
-              <a:t>●   Con tres o más autores uso </a:t>
-            </a:r>
-            <a:r>
-              <a:rPr sz="1500" b="1" i="0">
-                <a:solidFill>
-                  <a:srgbClr val="2B2B2B"/>
-                </a:solidFill>
-                <a:latin typeface="Calibri"/>
-              </a:rPr>
-              <a:t>et al.</a:t>
-            </a:r>
-            <a:r>
-              <a:rPr sz="1500" b="0" i="0">
-                <a:solidFill>
-                  <a:srgbClr val="2B2B2B"/>
-                </a:solidFill>
-                <a:latin typeface="Calibri"/>
-              </a:rPr>
-              <a:t> desde la primera cita, y de forma consistente.</a:t>
-            </a:r>
-          </a:p>
-          <a:p>
-            <a:pPr lvl="1">
-              <a:spcAft>
-                <a:spcPts val="600"/>
-              </a:spcAft>
-            </a:pPr>
-            <a:r>
-              <a:rPr sz="1500" b="0" i="0">
-                <a:solidFill>
-                  <a:srgbClr val="2B2B2B"/>
-                </a:solidFill>
-                <a:latin typeface="Calibri"/>
-              </a:rPr>
-              <a:t>●   Cada norma citada viene acompañada de </a:t>
-            </a:r>
-            <a:r>
-              <a:rPr sz="1500" b="1" i="0">
-                <a:solidFill>
-                  <a:srgbClr val="2B2B2B"/>
-                </a:solidFill>
-                <a:latin typeface="Calibri"/>
-              </a:rPr>
-              <a:t>su implicación</a:t>
-            </a:r>
-            <a:r>
-              <a:rPr sz="1500" b="0" i="0">
-                <a:solidFill>
-                  <a:srgbClr val="2B2B2B"/>
-                </a:solidFill>
-                <a:latin typeface="Calibri"/>
-              </a:rPr>
-              <a:t> para mi estudio (o declaré que no aplica).</a:t>
-            </a:r>
-          </a:p>
-          <a:p>
-            <a:pPr lvl="1">
-              <a:spcAft>
-                <a:spcPts val="600"/>
-              </a:spcAft>
-            </a:pPr>
-            <a:r>
-              <a:rPr sz="1500" b="0" i="0">
-                <a:solidFill>
-                  <a:srgbClr val="2B2B2B"/>
-                </a:solidFill>
-                <a:latin typeface="Calibri"/>
-              </a:rPr>
-              <a:t>●   Ninguna norma del documento está ahí "por si acaso": puedo explicar todas en voz alta.</a:t>
-            </a:r>
-          </a:p>
-          <a:p>
-            <a:pPr lvl="1">
-              <a:spcAft>
-                <a:spcPts val="600"/>
-              </a:spcAft>
-            </a:pPr>
-            <a:r>
-              <a:rPr sz="1500" b="0" i="0">
-                <a:solidFill>
-                  <a:srgbClr val="2B2B2B"/>
-                </a:solidFill>
-                <a:latin typeface="Calibri"/>
-              </a:rPr>
-              <a:t>●   Los verbos del marco legal están en </a:t>
-            </a:r>
-            <a:r>
-              <a:rPr sz="1500" b="1" i="0">
-                <a:solidFill>
-                  <a:srgbClr val="2B2B2B"/>
-                </a:solidFill>
-                <a:latin typeface="Calibri"/>
-              </a:rPr>
-              <a:t>condicional</a:t>
-            </a:r>
-            <a:r>
-              <a:rPr sz="1500" b="0" i="0">
-                <a:solidFill>
-                  <a:srgbClr val="2B2B2B"/>
-                </a:solidFill>
-                <a:latin typeface="Calibri"/>
-              </a:rPr>
-              <a:t>, no en pasado.</a:t>
-            </a:r>
-          </a:p>
-        </p:txBody>
-      </p:sp>
-      <p:sp>
-        <p:nvSpPr>
-          <p:cNvPr id="5" name="TextBox 4"/>
+              <a:rPr sz="1600" b="0" i="0">
+                <a:solidFill>
+                  <a:srgbClr val="2B2B2B"/>
+                </a:solidFill>
+                <a:latin typeface="Calibri"/>
+              </a:rPr>
+              <a:t>–   </a:t>
+            </a:r>
+            <a:r>
+              <a:rPr sz="1600" b="1" i="0">
+                <a:solidFill>
+                  <a:srgbClr val="2B2B2B"/>
+                </a:solidFill>
+                <a:latin typeface="Calibri"/>
+              </a:rPr>
+              <a:t>Verifique el estado:</a:t>
+            </a:r>
+            <a:r>
+              <a:rPr sz="1600" b="0" i="0">
+                <a:solidFill>
+                  <a:srgbClr val="2B2B2B"/>
+                </a:solidFill>
+                <a:latin typeface="Calibri"/>
+              </a:rPr>
+              <a:t> *subido* no es lo mismo que *entregado*. Lo que no esté en el aula, no está entregado.</a:t>
+            </a:r>
+          </a:p>
+        </p:txBody>
+      </p:sp>
+      <p:sp>
+        <p:nvSpPr>
+          <p:cNvPr id="6" name="TextBox 5"/>
           <p:cNvSpPr txBox="1"/>
           <p:nvPr/>
         </p:nvSpPr>
@@ -7113,7 +7159,7 @@
                 </a:solidFill>
                 <a:latin typeface="Calibri"/>
               </a:rPr>
-              <a:t>Trabajo autónomo y qué viene después</a:t>
+              <a:t>Checklist de autoevaluación antes de entregar</a:t>
             </a:r>
           </a:p>
         </p:txBody>
@@ -7152,16 +7198,7 @@
                 </a:solidFill>
                 <a:latin typeface="Calibri"/>
               </a:rPr>
-              <a:t>–   </a:t>
-            </a:r>
-            <a:r>
-              <a:rPr sz="1600" b="1" i="0">
-                <a:solidFill>
-                  <a:srgbClr val="2B2B2B"/>
-                </a:solidFill>
-                <a:latin typeface="Calibri"/>
-              </a:rPr>
-              <a:t>Autónomo de esta semana:</a:t>
+              <a:t>–   Marque cada casilla sobre su propio documento. Si alguna falla, todavía está a tiempo.</a:t>
             </a:r>
           </a:p>
           <a:p>
@@ -7177,7 +7214,7 @@
                 </a:solidFill>
                 <a:latin typeface="Calibri"/>
               </a:rPr>
-              <a:t>●   Integre al documento las correcciones que reciba en la tutoría y deje el marco referencial cerrado.</a:t>
+              <a:t>●   Toda cita del cuerpo tiene su referencia completa en la lista final.</a:t>
             </a:r>
           </a:p>
           <a:p>
@@ -7193,7 +7230,7 @@
                 </a:solidFill>
                 <a:latin typeface="Calibri"/>
               </a:rPr>
-              <a:t>●   Vuelva a correr la verificación cruzada </a:t>
+              <a:t>●   Toda referencia de la lista aparece citada </a:t>
             </a:r>
             <a:r>
               <a:rPr sz="1500" b="1" i="0">
@@ -7202,7 +7239,7 @@
                 </a:solidFill>
                 <a:latin typeface="Calibri"/>
               </a:rPr>
-              <a:t>después</a:t>
+              <a:t>al menos una vez</a:t>
             </a:r>
             <a:r>
               <a:rPr sz="1500" b="0" i="0">
@@ -7211,7 +7248,7 @@
                 </a:solidFill>
                 <a:latin typeface="Calibri"/>
               </a:rPr>
-              <a:t> de integrar: cada edición nueva puede crear una cita huérfana.</a:t>
+              <a:t> en el cuerpo.</a:t>
             </a:r>
           </a:p>
           <a:p>
@@ -7227,41 +7264,43 @@
                 </a:solidFill>
                 <a:latin typeface="Calibri"/>
               </a:rPr>
-              <a:t>●   Guarde una copia del documento antes de la próxima sesión: sobre él construiremos la metodología.</a:t>
-            </a:r>
-          </a:p>
-          <a:p>
-            <a:pPr>
-              <a:spcAft>
-                <a:spcPts val="1000"/>
-              </a:spcAft>
-            </a:pPr>
-            <a:r>
-              <a:rPr sz="1600" b="0" i="0">
-                <a:solidFill>
-                  <a:srgbClr val="2B2B2B"/>
-                </a:solidFill>
-                <a:latin typeface="Calibri"/>
-              </a:rPr>
-              <a:t>–   </a:t>
-            </a:r>
-            <a:r>
-              <a:rPr sz="1600" b="1" i="0">
-                <a:solidFill>
-                  <a:srgbClr val="2B2B2B"/>
-                </a:solidFill>
-                <a:latin typeface="Calibri"/>
-              </a:rPr>
-              <a:t>En la próxima sesión damos un salto grande:</a:t>
-            </a:r>
-            <a:r>
-              <a:rPr sz="1600" b="0" i="0">
-                <a:solidFill>
-                  <a:srgbClr val="2B2B2B"/>
-                </a:solidFill>
-                <a:latin typeface="Calibri"/>
-              </a:rPr>
-              <a:t> pasamos del "qué" al "cómo".</a:t>
+              <a:t>●   La lista está en </a:t>
+            </a:r>
+            <a:r>
+              <a:rPr sz="1500" b="1" i="0">
+                <a:solidFill>
+                  <a:srgbClr val="2B2B2B"/>
+                </a:solidFill>
+                <a:latin typeface="Calibri"/>
+              </a:rPr>
+              <a:t>orden alfabético</a:t>
+            </a:r>
+            <a:r>
+              <a:rPr sz="1500" b="0" i="0">
+                <a:solidFill>
+                  <a:srgbClr val="2B2B2B"/>
+                </a:solidFill>
+                <a:latin typeface="Calibri"/>
+              </a:rPr>
+              <a:t> y con </a:t>
+            </a:r>
+            <a:r>
+              <a:rPr sz="1500" b="1" i="0">
+                <a:solidFill>
+                  <a:srgbClr val="2B2B2B"/>
+                </a:solidFill>
+                <a:latin typeface="Calibri"/>
+              </a:rPr>
+              <a:t>sangría francesa</a:t>
+            </a:r>
+            <a:r>
+              <a:rPr sz="1500" b="0" i="0">
+                <a:solidFill>
+                  <a:srgbClr val="2B2B2B"/>
+                </a:solidFill>
+                <a:latin typeface="Calibri"/>
+              </a:rPr>
+              <a:t> de 1,27 cm.</a:t>
             </a:r>
           </a:p>
           <a:p>
@@ -7277,7 +7316,7 @@
                 </a:solidFill>
                 <a:latin typeface="Calibri"/>
               </a:rPr>
-              <a:t>●   Empezamos el </a:t>
+              <a:t>●   Las fuentes que tienen </a:t>
             </a:r>
             <a:r>
               <a:rPr sz="1500" b="1" i="0">
@@ -7286,7 +7325,7 @@
                 </a:solidFill>
                 <a:latin typeface="Calibri"/>
               </a:rPr>
-              <a:t>diseño metodológico</a:t>
+              <a:t>DOI</a:t>
             </a:r>
             <a:r>
               <a:rPr sz="1500" b="0" i="0">
@@ -7295,7 +7334,7 @@
                 </a:solidFill>
                 <a:latin typeface="Calibri"/>
               </a:rPr>
-              <a:t>: paradigma, enfoque y alcance.</a:t>
+              <a:t> lo muestran en formato `https://doi.org/...`.</a:t>
             </a:r>
           </a:p>
           <a:p>
@@ -7311,7 +7350,7 @@
                 </a:solidFill>
                 <a:latin typeface="Calibri"/>
               </a:rPr>
-              <a:t>●   Traiga su </a:t>
+              <a:t>●   Con tres o más autores uso </a:t>
             </a:r>
             <a:r>
               <a:rPr sz="1500" b="1" i="0">
@@ -7320,7 +7359,7 @@
                 </a:solidFill>
                 <a:latin typeface="Calibri"/>
               </a:rPr>
-              <a:t>pregunta de investigación</a:t>
+              <a:t>et al.</a:t>
             </a:r>
             <a:r>
               <a:rPr sz="1500" b="0" i="0">
@@ -7329,39 +7368,91 @@
                 </a:solidFill>
                 <a:latin typeface="Calibri"/>
               </a:rPr>
-              <a:t> escrita y a la mano — es la que decide el método.</a:t>
-            </a:r>
-          </a:p>
-          <a:p>
-            <a:pPr>
+              <a:t> desde la primera cita, y de forma consistente.</a:t>
+            </a:r>
+          </a:p>
+          <a:p>
+            <a:pPr lvl="1">
               <a:spcAft>
-                <a:spcPts val="1000"/>
+                <a:spcPts val="600"/>
               </a:spcAft>
             </a:pPr>
             <a:r>
-              <a:rPr sz="1600" b="0" i="0">
-                <a:solidFill>
-                  <a:srgbClr val="2B2B2B"/>
-                </a:solidFill>
-                <a:latin typeface="Calibri"/>
-              </a:rPr>
-              <a:t>–   Recuerde: las tutorías por equipo se acuerdan durante la semana con el Docente; no hay atención sin cita previa.</a:t>
-            </a:r>
-          </a:p>
-          <a:p>
-            <a:pPr>
+              <a:rPr sz="1500" b="0" i="0">
+                <a:solidFill>
+                  <a:srgbClr val="2B2B2B"/>
+                </a:solidFill>
+                <a:latin typeface="Calibri"/>
+              </a:rPr>
+              <a:t>●   Cada norma citada viene acompañada de </a:t>
+            </a:r>
+            <a:r>
+              <a:rPr sz="1500" b="1" i="0">
+                <a:solidFill>
+                  <a:srgbClr val="2B2B2B"/>
+                </a:solidFill>
+                <a:latin typeface="Calibri"/>
+              </a:rPr>
+              <a:t>su implicación</a:t>
+            </a:r>
+            <a:r>
+              <a:rPr sz="1500" b="0" i="0">
+                <a:solidFill>
+                  <a:srgbClr val="2B2B2B"/>
+                </a:solidFill>
+                <a:latin typeface="Calibri"/>
+              </a:rPr>
+              <a:t> para mi estudio (o declaré que no aplica).</a:t>
+            </a:r>
+          </a:p>
+          <a:p>
+            <a:pPr lvl="1">
               <a:spcAft>
-                <a:spcPts val="1000"/>
+                <a:spcPts val="600"/>
               </a:spcAft>
             </a:pPr>
             <a:r>
-              <a:rPr sz="1600" b="0" i="0">
-                <a:solidFill>
-                  <a:srgbClr val="2B2B2B"/>
-                </a:solidFill>
-                <a:latin typeface="Calibri"/>
-              </a:rPr>
-              <a:t>–   Todo el material de apoyo y la plantilla APA quedan en [URL CDigital — campus del curso pendiente].</a:t>
+              <a:rPr sz="1500" b="0" i="0">
+                <a:solidFill>
+                  <a:srgbClr val="2B2B2B"/>
+                </a:solidFill>
+                <a:latin typeface="Calibri"/>
+              </a:rPr>
+              <a:t>●   Ninguna norma del documento está ahí "por si acaso": puedo explicar todas en voz alta.</a:t>
+            </a:r>
+          </a:p>
+          <a:p>
+            <a:pPr lvl="1">
+              <a:spcAft>
+                <a:spcPts val="600"/>
+              </a:spcAft>
+            </a:pPr>
+            <a:r>
+              <a:rPr sz="1500" b="0" i="0">
+                <a:solidFill>
+                  <a:srgbClr val="2B2B2B"/>
+                </a:solidFill>
+                <a:latin typeface="Calibri"/>
+              </a:rPr>
+              <a:t>●   Los verbos del marco legal están en </a:t>
+            </a:r>
+            <a:r>
+              <a:rPr sz="1500" b="1" i="0">
+                <a:solidFill>
+                  <a:srgbClr val="2B2B2B"/>
+                </a:solidFill>
+                <a:latin typeface="Calibri"/>
+              </a:rPr>
+              <a:t>condicional</a:t>
+            </a:r>
+            <a:r>
+              <a:rPr sz="1500" b="0" i="0">
+                <a:solidFill>
+                  <a:srgbClr val="2B2B2B"/>
+                </a:solidFill>
+                <a:latin typeface="Calibri"/>
+              </a:rPr>
+              <a:t>, no en pasado.</a:t>
             </a:r>
           </a:p>
         </p:txBody>
@@ -7410,6 +7501,1732 @@
 </file>
 
 <file path=ppt/slides/slide18.xml><?xml version="1.0" encoding="utf-8"?>
+<p:sld xmlns:a="http://schemas.openxmlformats.org/drawingml/2006/main" xmlns:p="http://schemas.openxmlformats.org/presentationml/2006/main" xmlns:r="http://schemas.openxmlformats.org/officeDocument/2006/relationships">
+  <p:cSld>
+    <p:bg>
+      <p:bgPr>
+        <a:solidFill>
+          <a:srgbClr val="FFFFFF"/>
+        </a:solidFill>
+        <a:effectLst/>
+      </p:bgPr>
+    </p:bg>
+    <p:spTree>
+      <p:nvGrpSpPr>
+        <p:cNvPr id="1" name=""/>
+        <p:cNvGrpSpPr/>
+        <p:nvPr/>
+      </p:nvGrpSpPr>
+      <p:grpSpPr/>
+      <p:sp>
+        <p:nvSpPr>
+          <p:cNvPr id="2" name="Rectangle 1"/>
+          <p:cNvSpPr/>
+          <p:nvPr/>
+        </p:nvSpPr>
+        <p:spPr>
+          <a:xfrm>
+            <a:off x="0" y="0"/>
+            <a:ext cx="12191695" cy="1188720"/>
+          </a:xfrm>
+          <a:prstGeom prst="rect">
+            <a:avLst/>
+          </a:prstGeom>
+          <a:solidFill>
+            <a:srgbClr val="0C2340"/>
+          </a:solidFill>
+          <a:ln>
+            <a:noFill/>
+          </a:ln>
+          <a:effectLst/>
+        </p:spPr>
+        <p:style>
+          <a:lnRef idx="1">
+            <a:schemeClr val="accent1"/>
+          </a:lnRef>
+          <a:fillRef idx="3">
+            <a:schemeClr val="accent1"/>
+          </a:fillRef>
+          <a:effectRef idx="2">
+            <a:schemeClr val="accent1"/>
+          </a:effectRef>
+          <a:fontRef idx="minor">
+            <a:schemeClr val="lt1"/>
+          </a:fontRef>
+        </p:style>
+        <p:txBody>
+          <a:bodyPr rtlCol="0" anchor="ctr"/>
+          <a:lstStyle/>
+          <a:p>
+            <a:pPr algn="ctr"/>
+          </a:p>
+        </p:txBody>
+      </p:sp>
+      <p:sp>
+        <p:nvSpPr>
+          <p:cNvPr id="3" name="TextBox 2"/>
+          <p:cNvSpPr txBox="1"/>
+          <p:nvPr/>
+        </p:nvSpPr>
+        <p:spPr>
+          <a:xfrm>
+            <a:off x="640080" y="0"/>
+            <a:ext cx="9082735" cy="1188720"/>
+          </a:xfrm>
+          <a:prstGeom prst="rect">
+            <a:avLst/>
+          </a:prstGeom>
+          <a:noFill/>
+        </p:spPr>
+        <p:txBody>
+          <a:bodyPr wrap="square" anchor="ctr" lIns="0" rIns="0" tIns="0" bIns="0">
+            <a:spAutoFit/>
+          </a:bodyPr>
+          <a:lstStyle/>
+          <a:p>
+            <a:pPr algn="ctr"/>
+            <a:r>
+              <a:rPr sz="2600" b="1" i="0">
+                <a:solidFill>
+                  <a:srgbClr val="FFFFFF"/>
+                </a:solidFill>
+                <a:latin typeface="Calibri"/>
+              </a:rPr>
+              <a:t>Trabajo autónomo y qué viene después</a:t>
+            </a:r>
+          </a:p>
+        </p:txBody>
+      </p:sp>
+      <p:sp>
+        <p:nvSpPr>
+          <p:cNvPr id="4" name="TextBox 3"/>
+          <p:cNvSpPr txBox="1"/>
+          <p:nvPr/>
+        </p:nvSpPr>
+        <p:spPr>
+          <a:xfrm>
+            <a:off x="640080" y="1691639"/>
+            <a:ext cx="10911535" cy="4617720"/>
+          </a:xfrm>
+          <a:prstGeom prst="rect">
+            <a:avLst/>
+          </a:prstGeom>
+          <a:noFill/>
+        </p:spPr>
+        <p:txBody>
+          <a:bodyPr wrap="square" anchor="t" lIns="0" rIns="0" tIns="0" bIns="0">
+            <a:spAutoFit/>
+          </a:bodyPr>
+          <a:lstStyle/>
+          <a:p>
+            <a:pPr>
+              <a:spcAft>
+                <a:spcPts val="1000"/>
+              </a:spcAft>
+            </a:pPr>
+            <a:r>
+              <a:rPr sz="1600" b="0" i="0">
+                <a:solidFill>
+                  <a:srgbClr val="2B2B2B"/>
+                </a:solidFill>
+                <a:latin typeface="Calibri"/>
+              </a:rPr>
+              <a:t>–   </a:t>
+            </a:r>
+            <a:r>
+              <a:rPr sz="1600" b="1" i="0">
+                <a:solidFill>
+                  <a:srgbClr val="2B2B2B"/>
+                </a:solidFill>
+                <a:latin typeface="Calibri"/>
+              </a:rPr>
+              <a:t>Autónomo de esta semana:</a:t>
+            </a:r>
+          </a:p>
+          <a:p>
+            <a:pPr lvl="1">
+              <a:spcAft>
+                <a:spcPts val="600"/>
+              </a:spcAft>
+            </a:pPr>
+            <a:r>
+              <a:rPr sz="1500" b="0" i="0">
+                <a:solidFill>
+                  <a:srgbClr val="2B2B2B"/>
+                </a:solidFill>
+                <a:latin typeface="Calibri"/>
+              </a:rPr>
+              <a:t>●   Integre al documento las correcciones que reciba en la tutoría y deje el marco referencial cerrado.</a:t>
+            </a:r>
+          </a:p>
+          <a:p>
+            <a:pPr lvl="1">
+              <a:spcAft>
+                <a:spcPts val="600"/>
+              </a:spcAft>
+            </a:pPr>
+            <a:r>
+              <a:rPr sz="1500" b="0" i="0">
+                <a:solidFill>
+                  <a:srgbClr val="2B2B2B"/>
+                </a:solidFill>
+                <a:latin typeface="Calibri"/>
+              </a:rPr>
+              <a:t>●   Vuelva a correr la verificación cruzada </a:t>
+            </a:r>
+            <a:r>
+              <a:rPr sz="1500" b="1" i="0">
+                <a:solidFill>
+                  <a:srgbClr val="2B2B2B"/>
+                </a:solidFill>
+                <a:latin typeface="Calibri"/>
+              </a:rPr>
+              <a:t>después</a:t>
+            </a:r>
+            <a:r>
+              <a:rPr sz="1500" b="0" i="0">
+                <a:solidFill>
+                  <a:srgbClr val="2B2B2B"/>
+                </a:solidFill>
+                <a:latin typeface="Calibri"/>
+              </a:rPr>
+              <a:t> de integrar: cada edición nueva puede crear una cita huérfana.</a:t>
+            </a:r>
+          </a:p>
+          <a:p>
+            <a:pPr lvl="1">
+              <a:spcAft>
+                <a:spcPts val="600"/>
+              </a:spcAft>
+            </a:pPr>
+            <a:r>
+              <a:rPr sz="1500" b="0" i="0">
+                <a:solidFill>
+                  <a:srgbClr val="2B2B2B"/>
+                </a:solidFill>
+                <a:latin typeface="Calibri"/>
+              </a:rPr>
+              <a:t>●   Guarde una copia del documento antes de la próxima sesión: sobre él construiremos la metodología.</a:t>
+            </a:r>
+          </a:p>
+          <a:p>
+            <a:pPr>
+              <a:spcAft>
+                <a:spcPts val="1000"/>
+              </a:spcAft>
+            </a:pPr>
+            <a:r>
+              <a:rPr sz="1600" b="0" i="0">
+                <a:solidFill>
+                  <a:srgbClr val="2B2B2B"/>
+                </a:solidFill>
+                <a:latin typeface="Calibri"/>
+              </a:rPr>
+              <a:t>–   </a:t>
+            </a:r>
+            <a:r>
+              <a:rPr sz="1600" b="1" i="0">
+                <a:solidFill>
+                  <a:srgbClr val="2B2B2B"/>
+                </a:solidFill>
+                <a:latin typeface="Calibri"/>
+              </a:rPr>
+              <a:t>En la próxima sesión damos un salto grande:</a:t>
+            </a:r>
+            <a:r>
+              <a:rPr sz="1600" b="0" i="0">
+                <a:solidFill>
+                  <a:srgbClr val="2B2B2B"/>
+                </a:solidFill>
+                <a:latin typeface="Calibri"/>
+              </a:rPr>
+              <a:t> pasamos del "qué" al "cómo".</a:t>
+            </a:r>
+          </a:p>
+          <a:p>
+            <a:pPr lvl="1">
+              <a:spcAft>
+                <a:spcPts val="600"/>
+              </a:spcAft>
+            </a:pPr>
+            <a:r>
+              <a:rPr sz="1500" b="0" i="0">
+                <a:solidFill>
+                  <a:srgbClr val="2B2B2B"/>
+                </a:solidFill>
+                <a:latin typeface="Calibri"/>
+              </a:rPr>
+              <a:t>●   Empezamos el </a:t>
+            </a:r>
+            <a:r>
+              <a:rPr sz="1500" b="1" i="0">
+                <a:solidFill>
+                  <a:srgbClr val="2B2B2B"/>
+                </a:solidFill>
+                <a:latin typeface="Calibri"/>
+              </a:rPr>
+              <a:t>diseño metodológico</a:t>
+            </a:r>
+            <a:r>
+              <a:rPr sz="1500" b="0" i="0">
+                <a:solidFill>
+                  <a:srgbClr val="2B2B2B"/>
+                </a:solidFill>
+                <a:latin typeface="Calibri"/>
+              </a:rPr>
+              <a:t>: paradigma, enfoque y alcance.</a:t>
+            </a:r>
+          </a:p>
+          <a:p>
+            <a:pPr lvl="1">
+              <a:spcAft>
+                <a:spcPts val="600"/>
+              </a:spcAft>
+            </a:pPr>
+            <a:r>
+              <a:rPr sz="1500" b="0" i="0">
+                <a:solidFill>
+                  <a:srgbClr val="2B2B2B"/>
+                </a:solidFill>
+                <a:latin typeface="Calibri"/>
+              </a:rPr>
+              <a:t>●   Traiga su </a:t>
+            </a:r>
+            <a:r>
+              <a:rPr sz="1500" b="1" i="0">
+                <a:solidFill>
+                  <a:srgbClr val="2B2B2B"/>
+                </a:solidFill>
+                <a:latin typeface="Calibri"/>
+              </a:rPr>
+              <a:t>pregunta de investigación</a:t>
+            </a:r>
+            <a:r>
+              <a:rPr sz="1500" b="0" i="0">
+                <a:solidFill>
+                  <a:srgbClr val="2B2B2B"/>
+                </a:solidFill>
+                <a:latin typeface="Calibri"/>
+              </a:rPr>
+              <a:t> escrita y a la mano — es la que decide el método.</a:t>
+            </a:r>
+          </a:p>
+          <a:p>
+            <a:pPr>
+              <a:spcAft>
+                <a:spcPts val="1000"/>
+              </a:spcAft>
+            </a:pPr>
+            <a:r>
+              <a:rPr sz="1600" b="0" i="0">
+                <a:solidFill>
+                  <a:srgbClr val="2B2B2B"/>
+                </a:solidFill>
+                <a:latin typeface="Calibri"/>
+              </a:rPr>
+              <a:t>–   Recuerde: las tutorías por equipo se acuerdan durante la semana con el Docente; no hay atención sin cita previa.</a:t>
+            </a:r>
+          </a:p>
+          <a:p>
+            <a:pPr>
+              <a:spcAft>
+                <a:spcPts val="1000"/>
+              </a:spcAft>
+            </a:pPr>
+            <a:r>
+              <a:rPr sz="1600" b="0" i="0">
+                <a:solidFill>
+                  <a:srgbClr val="2B2B2B"/>
+                </a:solidFill>
+                <a:latin typeface="Calibri"/>
+              </a:rPr>
+              <a:t>–   Todo el material de apoyo y la plantilla APA quedan en https://cdigital.cun.edu.co/course/view.php?id=130378.</a:t>
+            </a:r>
+          </a:p>
+        </p:txBody>
+      </p:sp>
+      <p:sp>
+        <p:nvSpPr>
+          <p:cNvPr id="5" name="TextBox 4"/>
+          <p:cNvSpPr txBox="1"/>
+          <p:nvPr/>
+        </p:nvSpPr>
+        <p:spPr>
+          <a:xfrm>
+            <a:off x="11094415" y="6446520"/>
+            <a:ext cx="548640" cy="274320"/>
+          </a:xfrm>
+          <a:prstGeom prst="rect">
+            <a:avLst/>
+          </a:prstGeom>
+          <a:noFill/>
+        </p:spPr>
+        <p:txBody>
+          <a:bodyPr wrap="square" anchor="t" lIns="0" rIns="0" tIns="0" bIns="0">
+            <a:spAutoFit/>
+          </a:bodyPr>
+          <a:lstStyle/>
+          <a:p>
+            <a:pPr algn="r"/>
+            <a:r>
+              <a:rPr sz="1000" b="1" i="0">
+                <a:solidFill>
+                  <a:srgbClr val="8F989D"/>
+                </a:solidFill>
+                <a:latin typeface="Calibri"/>
+              </a:rPr>
+              <a:t>18</a:t>
+            </a:r>
+          </a:p>
+        </p:txBody>
+      </p:sp>
+    </p:spTree>
+  </p:cSld>
+  <p:clrMapOvr>
+    <a:masterClrMapping/>
+  </p:clrMapOvr>
+</p:sld>
+</file>
+
+<file path=ppt/slides/slide19.xml><?xml version="1.0" encoding="utf-8"?>
+<p:sld xmlns:a="http://schemas.openxmlformats.org/drawingml/2006/main" xmlns:p="http://schemas.openxmlformats.org/presentationml/2006/main" xmlns:r="http://schemas.openxmlformats.org/officeDocument/2006/relationships">
+  <p:cSld>
+    <p:bg>
+      <p:bgPr>
+        <a:solidFill>
+          <a:srgbClr val="FFFFFF"/>
+        </a:solidFill>
+        <a:effectLst/>
+      </p:bgPr>
+    </p:bg>
+    <p:spTree>
+      <p:nvGrpSpPr>
+        <p:cNvPr id="1" name=""/>
+        <p:cNvGrpSpPr/>
+        <p:nvPr/>
+      </p:nvGrpSpPr>
+      <p:grpSpPr/>
+      <p:sp>
+        <p:nvSpPr>
+          <p:cNvPr id="2" name="Rectangle 1"/>
+          <p:cNvSpPr/>
+          <p:nvPr/>
+        </p:nvSpPr>
+        <p:spPr>
+          <a:xfrm>
+            <a:off x="0" y="0"/>
+            <a:ext cx="12191695" cy="1188720"/>
+          </a:xfrm>
+          <a:prstGeom prst="rect">
+            <a:avLst/>
+          </a:prstGeom>
+          <a:solidFill>
+            <a:srgbClr val="0C2340"/>
+          </a:solidFill>
+          <a:ln>
+            <a:noFill/>
+          </a:ln>
+          <a:effectLst/>
+        </p:spPr>
+        <p:style>
+          <a:lnRef idx="1">
+            <a:schemeClr val="accent1"/>
+          </a:lnRef>
+          <a:fillRef idx="3">
+            <a:schemeClr val="accent1"/>
+          </a:fillRef>
+          <a:effectRef idx="2">
+            <a:schemeClr val="accent1"/>
+          </a:effectRef>
+          <a:fontRef idx="minor">
+            <a:schemeClr val="lt1"/>
+          </a:fontRef>
+        </p:style>
+        <p:txBody>
+          <a:bodyPr rtlCol="0" anchor="ctr"/>
+          <a:lstStyle/>
+          <a:p>
+            <a:pPr algn="ctr"/>
+          </a:p>
+        </p:txBody>
+      </p:sp>
+      <p:sp>
+        <p:nvSpPr>
+          <p:cNvPr id="3" name="TextBox 2"/>
+          <p:cNvSpPr txBox="1"/>
+          <p:nvPr/>
+        </p:nvSpPr>
+        <p:spPr>
+          <a:xfrm>
+            <a:off x="640080" y="0"/>
+            <a:ext cx="9082735" cy="1188720"/>
+          </a:xfrm>
+          <a:prstGeom prst="rect">
+            <a:avLst/>
+          </a:prstGeom>
+          <a:noFill/>
+        </p:spPr>
+        <p:txBody>
+          <a:bodyPr wrap="square" anchor="ctr" lIns="0" rIns="0" tIns="0" bIns="0">
+            <a:spAutoFit/>
+          </a:bodyPr>
+          <a:lstStyle/>
+          <a:p>
+            <a:pPr algn="ctr"/>
+            <a:r>
+              <a:rPr sz="2600" b="1" i="0">
+                <a:solidFill>
+                  <a:srgbClr val="FFFFFF"/>
+                </a:solidFill>
+                <a:latin typeface="Calibri"/>
+              </a:rPr>
+              <a:t>RUTA DE ENTREGABLES DEL CURSO</a:t>
+            </a:r>
+          </a:p>
+        </p:txBody>
+      </p:sp>
+      <p:sp>
+        <p:nvSpPr>
+          <p:cNvPr id="4" name="TextBox 3"/>
+          <p:cNvSpPr txBox="1"/>
+          <p:nvPr/>
+        </p:nvSpPr>
+        <p:spPr>
+          <a:xfrm>
+            <a:off x="640080" y="1280160"/>
+            <a:ext cx="10911535" cy="411480"/>
+          </a:xfrm>
+          <a:prstGeom prst="rect">
+            <a:avLst/>
+          </a:prstGeom>
+          <a:noFill/>
+        </p:spPr>
+        <p:txBody>
+          <a:bodyPr wrap="square" anchor="t" lIns="0" rIns="0" tIns="0" bIns="0">
+            <a:spAutoFit/>
+          </a:bodyPr>
+          <a:lstStyle/>
+          <a:p>
+            <a:pPr algn="ctr"/>
+            <a:r>
+              <a:rPr sz="1500" b="0" i="0">
+                <a:solidFill>
+                  <a:srgbClr val="2B2B2B"/>
+                </a:solidFill>
+                <a:latin typeface="Calibri"/>
+              </a:rPr>
+              <a:t>Sin fechas a propósito: aquí va </a:t>
+            </a:r>
+            <a:r>
+              <a:rPr sz="1500" b="1" i="0">
+                <a:solidFill>
+                  <a:srgbClr val="2B2B2B"/>
+                </a:solidFill>
+                <a:latin typeface="Calibri"/>
+              </a:rPr>
+              <a:t>en qué punto del curso</a:t>
+            </a:r>
+            <a:r>
+              <a:rPr sz="1500" b="0" i="0">
+                <a:solidFill>
+                  <a:srgbClr val="2B2B2B"/>
+                </a:solidFill>
+                <a:latin typeface="Calibri"/>
+              </a:rPr>
+              <a:t> cierra cada ítem · la ventana exacta la fija CDigital</a:t>
+            </a:r>
+          </a:p>
+        </p:txBody>
+      </p:sp>
+      <p:graphicFrame>
+        <p:nvGraphicFramePr>
+          <p:cNvPr id="5" name="Table 4"/>
+          <p:cNvGraphicFramePr>
+            <a:graphicFrameLocks noGrp="1"/>
+          </p:cNvGraphicFramePr>
+          <p:nvPr/>
+        </p:nvGraphicFramePr>
+        <p:xfrm>
+          <a:off x="640080" y="2011679"/>
+          <a:ext cx="10911533" cy="3017520"/>
+        </p:xfrm>
+        <a:graphic>
+          <a:graphicData uri="http://schemas.openxmlformats.org/drawingml/2006/table">
+            <a:tbl>
+              <a:tblPr>
+                <a:tableStyleId>{2D5ABB26-0587-4C30-8999-92F81FD0307C}</a:tableStyleId>
+              </a:tblPr>
+              <a:tblGrid>
+                <a:gridCol w="2659113"/>
+                <a:gridCol w="2659113"/>
+                <a:gridCol w="5593307"/>
+              </a:tblGrid>
+              <a:tr h="502920">
+                <a:tc>
+                  <a:txBody>
+                    <a:bodyPr/>
+                    <a:lstStyle/>
+                    <a:p>
+                      <a:pPr algn="l"/>
+                      <a:r>
+                        <a:rPr sz="1300" b="1" i="0">
+                          <a:solidFill>
+                            <a:srgbClr val="FFFFFF"/>
+                          </a:solidFill>
+                          <a:latin typeface="Calibri"/>
+                        </a:rPr>
+                        <a:t>Cierra en la semana de…</a:t>
+                      </a:r>
+                    </a:p>
+                  </a:txBody>
+                  <a:tcPr anchor="ctr" marL="109728" marR="91440" marT="36576" marB="36576">
+                    <a:solidFill>
+                      <a:srgbClr val="0C2340"/>
+                    </a:solidFill>
+                  </a:tcPr>
+                </a:tc>
+                <a:tc>
+                  <a:txBody>
+                    <a:bodyPr/>
+                    <a:lstStyle/>
+                    <a:p>
+                      <a:pPr algn="l"/>
+                      <a:r>
+                        <a:rPr sz="1300" b="1" i="0">
+                          <a:solidFill>
+                            <a:srgbClr val="FFFFFF"/>
+                          </a:solidFill>
+                          <a:latin typeface="Calibri"/>
+                        </a:rPr>
+                        <a:t>Entregable</a:t>
+                      </a:r>
+                    </a:p>
+                  </a:txBody>
+                  <a:tcPr anchor="ctr" marL="109728" marR="91440" marT="36576" marB="36576">
+                    <a:solidFill>
+                      <a:srgbClr val="0C2340"/>
+                    </a:solidFill>
+                  </a:tcPr>
+                </a:tc>
+                <a:tc>
+                  <a:txBody>
+                    <a:bodyPr/>
+                    <a:lstStyle/>
+                    <a:p>
+                      <a:pPr algn="l"/>
+                      <a:r>
+                        <a:rPr sz="1300" b="1" i="0">
+                          <a:solidFill>
+                            <a:srgbClr val="FFFFFF"/>
+                          </a:solidFill>
+                          <a:latin typeface="Calibri"/>
+                        </a:rPr>
+                        <a:t>Qué debes tener listo</a:t>
+                      </a:r>
+                    </a:p>
+                  </a:txBody>
+                  <a:tcPr anchor="ctr" marL="109728" marR="91440" marT="36576" marB="36576">
+                    <a:solidFill>
+                      <a:srgbClr val="0C2340"/>
+                    </a:solidFill>
+                  </a:tcPr>
+                </a:tc>
+              </a:tr>
+              <a:tr h="502920">
+                <a:tc>
+                  <a:txBody>
+                    <a:bodyPr/>
+                    <a:lstStyle/>
+                    <a:p>
+                      <a:pPr algn="l"/>
+                      <a:r>
+                        <a:rPr sz="1100" b="1" i="0">
+                          <a:solidFill>
+                            <a:srgbClr val="2B2B2B"/>
+                          </a:solidFill>
+                          <a:latin typeface="Calibri"/>
+                        </a:rPr>
+                        <a:t>Sesión 02</a:t>
+                      </a:r>
+                      <a:r>
+                        <a:rPr sz="1100" b="0" i="0">
+                          <a:solidFill>
+                            <a:srgbClr val="2B2B2B"/>
+                          </a:solidFill>
+                          <a:latin typeface="Calibri"/>
+                        </a:rPr>
+                        <a:t> · ya cerró</a:t>
+                      </a:r>
+                    </a:p>
+                  </a:txBody>
+                  <a:tcPr anchor="ctr" marL="109728" marR="91440" marT="36576" marB="36576">
+                    <a:solidFill>
+                      <a:srgbClr val="FFFFFF"/>
+                    </a:solidFill>
+                  </a:tcPr>
+                </a:tc>
+                <a:tc>
+                  <a:txBody>
+                    <a:bodyPr/>
+                    <a:lstStyle/>
+                    <a:p>
+                      <a:pPr algn="l"/>
+                      <a:r>
+                        <a:rPr sz="1100" b="1" i="0">
+                          <a:solidFill>
+                            <a:srgbClr val="2B2B2B"/>
+                          </a:solidFill>
+                          <a:latin typeface="Calibri"/>
+                        </a:rPr>
+                        <a:t>Quiz</a:t>
+                      </a:r>
+                      <a:r>
+                        <a:rPr sz="1100" b="0" i="0">
+                          <a:solidFill>
+                            <a:srgbClr val="2B2B2B"/>
+                          </a:solidFill>
+                          <a:latin typeface="Calibri"/>
+                        </a:rPr>
+                        <a:t> · Cuestionario · 25%</a:t>
+                      </a:r>
+                    </a:p>
+                  </a:txBody>
+                  <a:tcPr anchor="ctr" marL="109728" marR="91440" marT="36576" marB="36576">
+                    <a:solidFill>
+                      <a:srgbClr val="FFFFFF"/>
+                    </a:solidFill>
+                  </a:tcPr>
+                </a:tc>
+                <a:tc>
+                  <a:txBody>
+                    <a:bodyPr/>
+                    <a:lstStyle/>
+                    <a:p>
+                      <a:pPr algn="l"/>
+                      <a:r>
+                        <a:rPr sz="1100" b="0" i="0">
+                          <a:solidFill>
+                            <a:srgbClr val="2B2B2B"/>
+                          </a:solidFill>
+                          <a:latin typeface="Calibri"/>
+                        </a:rPr>
+                        <a:t>Estudia </a:t>
+                      </a:r>
+                      <a:r>
+                        <a:rPr sz="1100" b="1" i="0">
+                          <a:solidFill>
+                            <a:srgbClr val="2B2B2B"/>
+                          </a:solidFill>
+                          <a:latin typeface="Calibri"/>
+                        </a:rPr>
+                        <a:t>problema y pregunta</a:t>
+                      </a:r>
+                      <a:r>
+                        <a:rPr sz="1100" b="0" i="0">
+                          <a:solidFill>
+                            <a:srgbClr val="2B2B2B"/>
+                          </a:solidFill>
+                          <a:latin typeface="Calibri"/>
+                        </a:rPr>
+                        <a:t> de investigación; resuélvelo dentro de su ventana.</a:t>
+                      </a:r>
+                    </a:p>
+                  </a:txBody>
+                  <a:tcPr anchor="ctr" marL="109728" marR="91440" marT="36576" marB="36576">
+                    <a:solidFill>
+                      <a:srgbClr val="FFFFFF"/>
+                    </a:solidFill>
+                  </a:tcPr>
+                </a:tc>
+              </a:tr>
+              <a:tr h="502920">
+                <a:tc>
+                  <a:txBody>
+                    <a:bodyPr/>
+                    <a:lstStyle/>
+                    <a:p>
+                      <a:pPr algn="l"/>
+                      <a:r>
+                        <a:rPr sz="1100" b="1" i="0">
+                          <a:solidFill>
+                            <a:srgbClr val="2B2B2B"/>
+                          </a:solidFill>
+                          <a:latin typeface="Calibri"/>
+                        </a:rPr>
+                        <a:t>Sesión 07</a:t>
+                      </a:r>
+                      <a:r>
+                        <a:rPr sz="1100" b="0" i="0">
+                          <a:solidFill>
+                            <a:srgbClr val="2B2B2B"/>
+                          </a:solidFill>
+                          <a:latin typeface="Calibri"/>
+                        </a:rPr>
+                        <a:t> · cierra esta semana</a:t>
+                      </a:r>
+                    </a:p>
+                  </a:txBody>
+                  <a:tcPr anchor="ctr" marL="109728" marR="91440" marT="36576" marB="36576">
+                    <a:solidFill>
+                      <a:srgbClr val="F2F2F2"/>
+                    </a:solidFill>
+                  </a:tcPr>
+                </a:tc>
+                <a:tc>
+                  <a:txBody>
+                    <a:bodyPr/>
+                    <a:lstStyle/>
+                    <a:p>
+                      <a:pPr algn="l"/>
+                      <a:r>
+                        <a:rPr sz="1100" b="1" i="0">
+                          <a:solidFill>
+                            <a:srgbClr val="2B2B2B"/>
+                          </a:solidFill>
+                          <a:latin typeface="Calibri"/>
+                        </a:rPr>
+                        <a:t>ACA 1</a:t>
+                      </a:r>
+                      <a:r>
+                        <a:rPr sz="1100" b="0" i="0">
+                          <a:solidFill>
+                            <a:srgbClr val="2B2B2B"/>
+                          </a:solidFill>
+                          <a:latin typeface="Calibri"/>
+                        </a:rPr>
+                        <a:t> · Tarea · 25%</a:t>
+                      </a:r>
+                    </a:p>
+                  </a:txBody>
+                  <a:tcPr anchor="ctr" marL="109728" marR="91440" marT="36576" marB="36576">
+                    <a:solidFill>
+                      <a:srgbClr val="F2F2F2"/>
+                    </a:solidFill>
+                  </a:tcPr>
+                </a:tc>
+                <a:tc>
+                  <a:txBody>
+                    <a:bodyPr/>
+                    <a:lstStyle/>
+                    <a:p>
+                      <a:pPr algn="l"/>
+                      <a:r>
+                        <a:rPr sz="1100" b="0" i="0">
+                          <a:solidFill>
+                            <a:srgbClr val="2B2B2B"/>
+                          </a:solidFill>
+                          <a:latin typeface="Calibri"/>
+                        </a:rPr>
+                        <a:t>Sube en </a:t>
+                      </a:r>
+                      <a:r>
+                        <a:rPr sz="1100" b="1" i="0">
+                          <a:solidFill>
+                            <a:srgbClr val="2B2B2B"/>
+                          </a:solidFill>
+                          <a:latin typeface="Calibri"/>
+                        </a:rPr>
+                        <a:t>plantilla APA</a:t>
+                      </a:r>
+                      <a:r>
+                        <a:rPr sz="1100" b="0" i="0">
+                          <a:solidFill>
+                            <a:srgbClr val="2B2B2B"/>
+                          </a:solidFill>
+                          <a:latin typeface="Calibri"/>
+                        </a:rPr>
+                        <a:t> problema, pregunta, objetivos, mínimo 6 antecedentes y los marcos.</a:t>
+                      </a:r>
+                    </a:p>
+                  </a:txBody>
+                  <a:tcPr anchor="ctr" marL="109728" marR="91440" marT="36576" marB="36576">
+                    <a:solidFill>
+                      <a:srgbClr val="F2F2F2"/>
+                    </a:solidFill>
+                  </a:tcPr>
+                </a:tc>
+              </a:tr>
+              <a:tr h="502920">
+                <a:tc>
+                  <a:txBody>
+                    <a:bodyPr/>
+                    <a:lstStyle/>
+                    <a:p>
+                      <a:pPr algn="l"/>
+                      <a:r>
+                        <a:rPr sz="1100" b="1" i="0">
+                          <a:solidFill>
+                            <a:srgbClr val="2B2B2B"/>
+                          </a:solidFill>
+                          <a:latin typeface="Calibri"/>
+                        </a:rPr>
+                        <a:t>Sesión 10</a:t>
+                      </a:r>
+                      <a:r>
+                        <a:rPr sz="1100" b="0" i="0">
+                          <a:solidFill>
+                            <a:srgbClr val="2B2B2B"/>
+                          </a:solidFill>
+                          <a:latin typeface="Calibri"/>
+                        </a:rPr>
+                        <a:t> · pendiente</a:t>
+                      </a:r>
+                    </a:p>
+                  </a:txBody>
+                  <a:tcPr anchor="ctr" marL="109728" marR="91440" marT="36576" marB="36576">
+                    <a:solidFill>
+                      <a:srgbClr val="FFFFFF"/>
+                    </a:solidFill>
+                  </a:tcPr>
+                </a:tc>
+                <a:tc>
+                  <a:txBody>
+                    <a:bodyPr/>
+                    <a:lstStyle/>
+                    <a:p>
+                      <a:pPr algn="l"/>
+                      <a:r>
+                        <a:rPr sz="1100" b="1" i="0">
+                          <a:solidFill>
+                            <a:srgbClr val="2B2B2B"/>
+                          </a:solidFill>
+                          <a:latin typeface="Calibri"/>
+                        </a:rPr>
+                        <a:t>ACA FINAL</a:t>
+                      </a:r>
+                      <a:r>
+                        <a:rPr sz="1100" b="0" i="0">
+                          <a:solidFill>
+                            <a:srgbClr val="2B2B2B"/>
+                          </a:solidFill>
+                          <a:latin typeface="Calibri"/>
+                        </a:rPr>
+                        <a:t> · Tarea · 42%</a:t>
+                      </a:r>
+                    </a:p>
+                  </a:txBody>
+                  <a:tcPr anchor="ctr" marL="109728" marR="91440" marT="36576" marB="36576">
+                    <a:solidFill>
+                      <a:srgbClr val="FFFFFF"/>
+                    </a:solidFill>
+                  </a:tcPr>
+                </a:tc>
+                <a:tc>
+                  <a:txBody>
+                    <a:bodyPr/>
+                    <a:lstStyle/>
+                    <a:p>
+                      <a:pPr algn="l"/>
+                      <a:r>
+                        <a:rPr sz="1100" b="0" i="0">
+                          <a:solidFill>
+                            <a:srgbClr val="2B2B2B"/>
+                          </a:solidFill>
+                          <a:latin typeface="Calibri"/>
+                        </a:rPr>
+                        <a:t>Sube el anteproyecto integrado con las </a:t>
+                      </a:r>
+                      <a:r>
+                        <a:rPr sz="1100" b="1" i="0">
+                          <a:solidFill>
+                            <a:srgbClr val="2B2B2B"/>
+                          </a:solidFill>
+                          <a:latin typeface="Calibri"/>
+                        </a:rPr>
+                        <a:t>correcciones</a:t>
+                      </a:r>
+                      <a:r>
+                        <a:rPr sz="1100" b="0" i="0">
+                          <a:solidFill>
+                            <a:srgbClr val="2B2B2B"/>
+                          </a:solidFill>
+                          <a:latin typeface="Calibri"/>
+                        </a:rPr>
+                        <a:t> de la ACA 1, metodología y viabilidad.</a:t>
+                      </a:r>
+                    </a:p>
+                  </a:txBody>
+                  <a:tcPr anchor="ctr" marL="109728" marR="91440" marT="36576" marB="36576">
+                    <a:solidFill>
+                      <a:srgbClr val="FFFFFF"/>
+                    </a:solidFill>
+                  </a:tcPr>
+                </a:tc>
+              </a:tr>
+              <a:tr h="502920">
+                <a:tc>
+                  <a:txBody>
+                    <a:bodyPr/>
+                    <a:lstStyle/>
+                    <a:p>
+                      <a:pPr algn="l"/>
+                      <a:r>
+                        <a:rPr sz="1100" b="1" i="0">
+                          <a:solidFill>
+                            <a:srgbClr val="2B2B2B"/>
+                          </a:solidFill>
+                          <a:latin typeface="Calibri"/>
+                        </a:rPr>
+                        <a:t>Sesión 11</a:t>
+                      </a:r>
+                      <a:r>
+                        <a:rPr sz="1100" b="0" i="0">
+                          <a:solidFill>
+                            <a:srgbClr val="2B2B2B"/>
+                          </a:solidFill>
+                          <a:latin typeface="Calibri"/>
+                        </a:rPr>
+                        <a:t> · pendiente</a:t>
+                      </a:r>
+                    </a:p>
+                  </a:txBody>
+                  <a:tcPr anchor="ctr" marL="109728" marR="91440" marT="36576" marB="36576">
+                    <a:solidFill>
+                      <a:srgbClr val="F2F2F2"/>
+                    </a:solidFill>
+                  </a:tcPr>
+                </a:tc>
+                <a:tc>
+                  <a:txBody>
+                    <a:bodyPr/>
+                    <a:lstStyle/>
+                    <a:p>
+                      <a:pPr algn="l"/>
+                      <a:r>
+                        <a:rPr sz="1100" b="1" i="0">
+                          <a:solidFill>
+                            <a:srgbClr val="2B2B2B"/>
+                          </a:solidFill>
+                          <a:latin typeface="Calibri"/>
+                        </a:rPr>
+                        <a:t>Autoevaluación</a:t>
+                      </a:r>
+                      <a:r>
+                        <a:rPr sz="1100" b="0" i="0">
+                          <a:solidFill>
+                            <a:srgbClr val="2B2B2B"/>
+                          </a:solidFill>
+                          <a:latin typeface="Calibri"/>
+                        </a:rPr>
+                        <a:t> · Cuestionario · 4%</a:t>
+                      </a:r>
+                    </a:p>
+                  </a:txBody>
+                  <a:tcPr anchor="ctr" marL="109728" marR="91440" marT="36576" marB="36576">
+                    <a:solidFill>
+                      <a:srgbClr val="F2F2F2"/>
+                    </a:solidFill>
+                  </a:tcPr>
+                </a:tc>
+                <a:tc>
+                  <a:txBody>
+                    <a:bodyPr/>
+                    <a:lstStyle/>
+                    <a:p>
+                      <a:pPr algn="l"/>
+                      <a:r>
+                        <a:rPr sz="1100" b="0" i="0">
+                          <a:solidFill>
+                            <a:srgbClr val="2B2B2B"/>
+                          </a:solidFill>
+                          <a:latin typeface="Calibri"/>
+                        </a:rPr>
+                        <a:t>Diligénciala tú, dentro de su ventana, según tu </a:t>
+                      </a:r>
+                      <a:r>
+                        <a:rPr sz="1100" b="1" i="0">
+                          <a:solidFill>
+                            <a:srgbClr val="2B2B2B"/>
+                          </a:solidFill>
+                          <a:latin typeface="Calibri"/>
+                        </a:rPr>
+                        <a:t>participación real</a:t>
+                      </a:r>
+                      <a:r>
+                        <a:rPr sz="1100" b="0" i="0">
+                          <a:solidFill>
+                            <a:srgbClr val="2B2B2B"/>
+                          </a:solidFill>
+                          <a:latin typeface="Calibri"/>
+                        </a:rPr>
+                        <a:t>.</a:t>
+                      </a:r>
+                    </a:p>
+                  </a:txBody>
+                  <a:tcPr anchor="ctr" marL="109728" marR="91440" marT="36576" marB="36576">
+                    <a:solidFill>
+                      <a:srgbClr val="F2F2F2"/>
+                    </a:solidFill>
+                  </a:tcPr>
+                </a:tc>
+              </a:tr>
+              <a:tr h="502920">
+                <a:tc>
+                  <a:txBody>
+                    <a:bodyPr/>
+                    <a:lstStyle/>
+                    <a:p>
+                      <a:pPr algn="l"/>
+                      <a:r>
+                        <a:rPr sz="1100" b="1" i="0">
+                          <a:solidFill>
+                            <a:srgbClr val="2B2B2B"/>
+                          </a:solidFill>
+                          <a:latin typeface="Calibri"/>
+                        </a:rPr>
+                        <a:t>Sesión 11</a:t>
+                      </a:r>
+                      <a:r>
+                        <a:rPr sz="1100" b="0" i="0">
+                          <a:solidFill>
+                            <a:srgbClr val="2B2B2B"/>
+                          </a:solidFill>
+                          <a:latin typeface="Calibri"/>
+                        </a:rPr>
+                        <a:t> · pendiente</a:t>
+                      </a:r>
+                    </a:p>
+                  </a:txBody>
+                  <a:tcPr anchor="ctr" marL="109728" marR="91440" marT="36576" marB="36576">
+                    <a:solidFill>
+                      <a:srgbClr val="FFFFFF"/>
+                    </a:solidFill>
+                  </a:tcPr>
+                </a:tc>
+                <a:tc>
+                  <a:txBody>
+                    <a:bodyPr/>
+                    <a:lstStyle/>
+                    <a:p>
+                      <a:pPr algn="l"/>
+                      <a:r>
+                        <a:rPr sz="1100" b="1" i="0">
+                          <a:solidFill>
+                            <a:srgbClr val="2B2B2B"/>
+                          </a:solidFill>
+                          <a:latin typeface="Calibri"/>
+                        </a:rPr>
+                        <a:t>Coevaluación</a:t>
+                      </a:r>
+                      <a:r>
+                        <a:rPr sz="1100" b="0" i="0">
+                          <a:solidFill>
+                            <a:srgbClr val="2B2B2B"/>
+                          </a:solidFill>
+                          <a:latin typeface="Calibri"/>
+                        </a:rPr>
+                        <a:t> · Foro · 4%</a:t>
+                      </a:r>
+                    </a:p>
+                  </a:txBody>
+                  <a:tcPr anchor="ctr" marL="109728" marR="91440" marT="36576" marB="36576">
+                    <a:solidFill>
+                      <a:srgbClr val="FFFFFF"/>
+                    </a:solidFill>
+                  </a:tcPr>
+                </a:tc>
+                <a:tc>
+                  <a:txBody>
+                    <a:bodyPr/>
+                    <a:lstStyle/>
+                    <a:p>
+                      <a:pPr algn="l"/>
+                      <a:r>
+                        <a:rPr sz="1100" b="1" i="0">
+                          <a:solidFill>
+                            <a:srgbClr val="2B2B2B"/>
+                          </a:solidFill>
+                          <a:latin typeface="Calibri"/>
+                        </a:rPr>
+                        <a:t>Publica</a:t>
+                      </a:r>
+                      <a:r>
+                        <a:rPr sz="1100" b="0" i="0">
+                          <a:solidFill>
+                            <a:srgbClr val="2B2B2B"/>
+                          </a:solidFill>
+                          <a:latin typeface="Calibri"/>
+                        </a:rPr>
+                        <a:t> tu propio aporte y valora hechos del trabajo del equipo, con respeto.</a:t>
+                      </a:r>
+                    </a:p>
+                  </a:txBody>
+                  <a:tcPr anchor="ctr" marL="109728" marR="91440" marT="36576" marB="36576">
+                    <a:solidFill>
+                      <a:srgbClr val="FFFFFF"/>
+                    </a:solidFill>
+                  </a:tcPr>
+                </a:tc>
+              </a:tr>
+            </a:tbl>
+          </a:graphicData>
+        </a:graphic>
+      </p:graphicFrame>
+      <p:sp>
+        <p:nvSpPr>
+          <p:cNvPr id="6" name="TextBox 5"/>
+          <p:cNvSpPr txBox="1"/>
+          <p:nvPr/>
+        </p:nvSpPr>
+        <p:spPr>
+          <a:xfrm>
+            <a:off x="640080" y="5166360"/>
+            <a:ext cx="10911535" cy="548640"/>
+          </a:xfrm>
+          <a:prstGeom prst="rect">
+            <a:avLst/>
+          </a:prstGeom>
+          <a:noFill/>
+        </p:spPr>
+        <p:txBody>
+          <a:bodyPr wrap="square" anchor="t" lIns="0" rIns="0" tIns="0" bIns="0">
+            <a:spAutoFit/>
+          </a:bodyPr>
+          <a:lstStyle/>
+          <a:p>
+            <a:r>
+              <a:rPr sz="1200" b="0" i="1">
+                <a:solidFill>
+                  <a:srgbClr val="2B2B2B"/>
+                </a:solidFill>
+                <a:latin typeface="Calibri"/>
+              </a:rPr>
+              <a:t>Esta misma tabla va al final de todas las sesiones. La </a:t>
+            </a:r>
+            <a:r>
+              <a:rPr sz="1200" b="1" i="1">
+                <a:solidFill>
+                  <a:srgbClr val="2B2B2B"/>
+                </a:solidFill>
+                <a:latin typeface="Calibri"/>
+              </a:rPr>
+              <a:t>fecha</a:t>
+            </a:r>
+            <a:r>
+              <a:rPr sz="1200" b="0" i="1">
+                <a:solidFill>
+                  <a:srgbClr val="2B2B2B"/>
+                </a:solidFill>
+                <a:latin typeface="Calibri"/>
+              </a:rPr>
+              <a:t> de cada ventana está en el enunciado del ítem (`Clases/Recursos/ACAs/`) y en el aula: si el aula y cualquier otro material se contradicen, </a:t>
+            </a:r>
+            <a:r>
+              <a:rPr sz="1200" b="1" i="1">
+                <a:solidFill>
+                  <a:srgbClr val="2B2B2B"/>
+                </a:solidFill>
+                <a:latin typeface="Calibri"/>
+              </a:rPr>
+              <a:t>manda el aula</a:t>
+            </a:r>
+            <a:r>
+              <a:rPr sz="1200" b="0" i="1">
+                <a:solidFill>
+                  <a:srgbClr val="2B2B2B"/>
+                </a:solidFill>
+                <a:latin typeface="Calibri"/>
+              </a:rPr>
+              <a:t>.</a:t>
+            </a:r>
+          </a:p>
+        </p:txBody>
+      </p:sp>
+      <p:sp>
+        <p:nvSpPr>
+          <p:cNvPr id="7" name="TextBox 6"/>
+          <p:cNvSpPr txBox="1"/>
+          <p:nvPr/>
+        </p:nvSpPr>
+        <p:spPr>
+          <a:xfrm>
+            <a:off x="11094415" y="6446520"/>
+            <a:ext cx="548640" cy="274320"/>
+          </a:xfrm>
+          <a:prstGeom prst="rect">
+            <a:avLst/>
+          </a:prstGeom>
+          <a:noFill/>
+        </p:spPr>
+        <p:txBody>
+          <a:bodyPr wrap="square" anchor="t" lIns="0" rIns="0" tIns="0" bIns="0">
+            <a:spAutoFit/>
+          </a:bodyPr>
+          <a:lstStyle/>
+          <a:p>
+            <a:pPr algn="r"/>
+            <a:r>
+              <a:rPr sz="1000" b="1" i="0">
+                <a:solidFill>
+                  <a:srgbClr val="8F989D"/>
+                </a:solidFill>
+                <a:latin typeface="Calibri"/>
+              </a:rPr>
+              <a:t>19</a:t>
+            </a:r>
+          </a:p>
+        </p:txBody>
+      </p:sp>
+    </p:spTree>
+  </p:cSld>
+  <p:clrMapOvr>
+    <a:masterClrMapping/>
+  </p:clrMapOvr>
+</p:sld>
+</file>
+
+<file path=ppt/slides/slide2.xml><?xml version="1.0" encoding="utf-8"?>
+<p:sld xmlns:a="http://schemas.openxmlformats.org/drawingml/2006/main" xmlns:p="http://schemas.openxmlformats.org/presentationml/2006/main" xmlns:r="http://schemas.openxmlformats.org/officeDocument/2006/relationships">
+  <p:cSld>
+    <p:bg>
+      <p:bgPr>
+        <a:solidFill>
+          <a:srgbClr val="FFFFFF"/>
+        </a:solidFill>
+        <a:effectLst/>
+      </p:bgPr>
+    </p:bg>
+    <p:spTree>
+      <p:nvGrpSpPr>
+        <p:cNvPr id="1" name=""/>
+        <p:cNvGrpSpPr/>
+        <p:nvPr/>
+      </p:nvGrpSpPr>
+      <p:grpSpPr/>
+      <p:sp>
+        <p:nvSpPr>
+          <p:cNvPr id="2" name="Rectangle 1"/>
+          <p:cNvSpPr/>
+          <p:nvPr/>
+        </p:nvSpPr>
+        <p:spPr>
+          <a:xfrm>
+            <a:off x="0" y="0"/>
+            <a:ext cx="12191695" cy="1188720"/>
+          </a:xfrm>
+          <a:prstGeom prst="rect">
+            <a:avLst/>
+          </a:prstGeom>
+          <a:solidFill>
+            <a:srgbClr val="0C2340"/>
+          </a:solidFill>
+          <a:ln>
+            <a:noFill/>
+          </a:ln>
+          <a:effectLst/>
+        </p:spPr>
+        <p:style>
+          <a:lnRef idx="1">
+            <a:schemeClr val="accent1"/>
+          </a:lnRef>
+          <a:fillRef idx="3">
+            <a:schemeClr val="accent1"/>
+          </a:fillRef>
+          <a:effectRef idx="2">
+            <a:schemeClr val="accent1"/>
+          </a:effectRef>
+          <a:fontRef idx="minor">
+            <a:schemeClr val="lt1"/>
+          </a:fontRef>
+        </p:style>
+        <p:txBody>
+          <a:bodyPr rtlCol="0" anchor="ctr"/>
+          <a:lstStyle/>
+          <a:p>
+            <a:pPr algn="ctr"/>
+          </a:p>
+        </p:txBody>
+      </p:sp>
+      <p:sp>
+        <p:nvSpPr>
+          <p:cNvPr id="3" name="TextBox 2"/>
+          <p:cNvSpPr txBox="1"/>
+          <p:nvPr/>
+        </p:nvSpPr>
+        <p:spPr>
+          <a:xfrm>
+            <a:off x="640080" y="0"/>
+            <a:ext cx="9082735" cy="1188720"/>
+          </a:xfrm>
+          <a:prstGeom prst="rect">
+            <a:avLst/>
+          </a:prstGeom>
+          <a:noFill/>
+        </p:spPr>
+        <p:txBody>
+          <a:bodyPr wrap="square" anchor="ctr" lIns="0" rIns="0" tIns="0" bIns="0">
+            <a:spAutoFit/>
+          </a:bodyPr>
+          <a:lstStyle/>
+          <a:p>
+            <a:pPr algn="ctr"/>
+            <a:r>
+              <a:rPr sz="2600" b="1" i="0">
+                <a:solidFill>
+                  <a:srgbClr val="FFFFFF"/>
+                </a:solidFill>
+                <a:latin typeface="Calibri"/>
+              </a:rPr>
+              <a:t>Dos cosas pueden hundir un anteproyecto de IA en la última revisión</a:t>
+            </a:r>
+          </a:p>
+        </p:txBody>
+      </p:sp>
+      <p:sp>
+        <p:nvSpPr>
+          <p:cNvPr id="4" name="TextBox 3"/>
+          <p:cNvSpPr txBox="1"/>
+          <p:nvPr/>
+        </p:nvSpPr>
+        <p:spPr>
+          <a:xfrm>
+            <a:off x="640080" y="1691639"/>
+            <a:ext cx="10911535" cy="4617720"/>
+          </a:xfrm>
+          <a:prstGeom prst="rect">
+            <a:avLst/>
+          </a:prstGeom>
+          <a:noFill/>
+        </p:spPr>
+        <p:txBody>
+          <a:bodyPr wrap="square" anchor="t" lIns="0" rIns="0" tIns="0" bIns="0">
+            <a:spAutoFit/>
+          </a:bodyPr>
+          <a:lstStyle/>
+          <a:p>
+            <a:pPr>
+              <a:spcAft>
+                <a:spcPts val="1000"/>
+              </a:spcAft>
+            </a:pPr>
+            <a:r>
+              <a:rPr sz="1600" b="0" i="0">
+                <a:solidFill>
+                  <a:srgbClr val="2B2B2B"/>
+                </a:solidFill>
+                <a:latin typeface="Calibri"/>
+              </a:rPr>
+              <a:t>–   Caso real y frecuente: un equipo propone un </a:t>
+            </a:r>
+            <a:r>
+              <a:rPr sz="1600" b="1" i="0">
+                <a:solidFill>
+                  <a:srgbClr val="2B2B2B"/>
+                </a:solidFill>
+                <a:latin typeface="Calibri"/>
+              </a:rPr>
+              <a:t>modelo que clasifica PQRS</a:t>
+            </a:r>
+            <a:r>
+              <a:rPr sz="1600" b="0" i="0">
+                <a:solidFill>
+                  <a:srgbClr val="2B2B2B"/>
+                </a:solidFill>
+                <a:latin typeface="Calibri"/>
+              </a:rPr>
+              <a:t> de una secretaría de salud municipal.</a:t>
+            </a:r>
+          </a:p>
+          <a:p>
+            <a:pPr lvl="1">
+              <a:spcAft>
+                <a:spcPts val="600"/>
+              </a:spcAft>
+            </a:pPr>
+            <a:r>
+              <a:rPr sz="1500" b="0" i="0">
+                <a:solidFill>
+                  <a:srgbClr val="2B2B2B"/>
+                </a:solidFill>
+                <a:latin typeface="Calibri"/>
+              </a:rPr>
+              <a:t>●   Las PQRS traen nombre, cédula, teléfono y diagnóstico: eso es </a:t>
+            </a:r>
+            <a:r>
+              <a:rPr sz="1500" b="1" i="0">
+                <a:solidFill>
+                  <a:srgbClr val="2B2B2B"/>
+                </a:solidFill>
+                <a:latin typeface="Calibri"/>
+              </a:rPr>
+              <a:t>dato personal</a:t>
+            </a:r>
+            <a:r>
+              <a:rPr sz="1500" b="0" i="0">
+                <a:solidFill>
+                  <a:srgbClr val="2B2B2B"/>
+                </a:solidFill>
+                <a:latin typeface="Calibri"/>
+              </a:rPr>
+              <a:t>, y algunos son </a:t>
+            </a:r>
+            <a:r>
+              <a:rPr sz="1500" b="1" i="0">
+                <a:solidFill>
+                  <a:srgbClr val="2B2B2B"/>
+                </a:solidFill>
+                <a:latin typeface="Calibri"/>
+              </a:rPr>
+              <a:t>datos sensibles</a:t>
+            </a:r>
+            <a:r>
+              <a:rPr sz="1500" b="0" i="0">
+                <a:solidFill>
+                  <a:srgbClr val="2B2B2B"/>
+                </a:solidFill>
+                <a:latin typeface="Calibri"/>
+              </a:rPr>
+              <a:t>.</a:t>
+            </a:r>
+          </a:p>
+          <a:p>
+            <a:pPr lvl="1">
+              <a:spcAft>
+                <a:spcPts val="600"/>
+              </a:spcAft>
+            </a:pPr>
+            <a:r>
+              <a:rPr sz="1500" b="0" i="0">
+                <a:solidFill>
+                  <a:srgbClr val="2B2B2B"/>
+                </a:solidFill>
+                <a:latin typeface="Calibri"/>
+              </a:rPr>
+              <a:t>●   El anteproyecto no menciona ni una norma. Resultado: la propuesta es inviable antes de empezar.</a:t>
+            </a:r>
+          </a:p>
+          <a:p>
+            <a:pPr>
+              <a:spcAft>
+                <a:spcPts val="1000"/>
+              </a:spcAft>
+            </a:pPr>
+            <a:r>
+              <a:rPr sz="1600" b="0" i="0">
+                <a:solidFill>
+                  <a:srgbClr val="2B2B2B"/>
+                </a:solidFill>
+                <a:latin typeface="Calibri"/>
+              </a:rPr>
+              <a:t>–   Segundo caso: el documento tiene 18 referencias al final y solo 6 aparecen citadas en el texto.</a:t>
+            </a:r>
+          </a:p>
+          <a:p>
+            <a:pPr lvl="1">
+              <a:spcAft>
+                <a:spcPts val="600"/>
+              </a:spcAft>
+            </a:pPr>
+            <a:r>
+              <a:rPr sz="1500" b="0" i="0">
+                <a:solidFill>
+                  <a:srgbClr val="2B2B2B"/>
+                </a:solidFill>
+                <a:latin typeface="Calibri"/>
+              </a:rPr>
+              <a:t>●   Las otras 12 son </a:t>
+            </a:r>
+            <a:r>
+              <a:rPr sz="1500" b="1" i="0">
+                <a:solidFill>
+                  <a:srgbClr val="2B2B2B"/>
+                </a:solidFill>
+                <a:latin typeface="Calibri"/>
+              </a:rPr>
+              <a:t>bibliografía huérfana</a:t>
+            </a:r>
+            <a:r>
+              <a:rPr sz="1500" b="0" i="0">
+                <a:solidFill>
+                  <a:srgbClr val="2B2B2B"/>
+                </a:solidFill>
+                <a:latin typeface="Calibri"/>
+              </a:rPr>
+              <a:t>: se ven como relleno y bajan la nota de todo el marco referencial.</a:t>
+            </a:r>
+          </a:p>
+          <a:p>
+            <a:pPr>
+              <a:spcAft>
+                <a:spcPts val="1000"/>
+              </a:spcAft>
+            </a:pPr>
+            <a:r>
+              <a:rPr sz="1600" b="0" i="0">
+                <a:solidFill>
+                  <a:srgbClr val="2B2B2B"/>
+                </a:solidFill>
+                <a:latin typeface="Calibri"/>
+              </a:rPr>
+              <a:t>–   Hoy cerramos el </a:t>
+            </a:r>
+            <a:r>
+              <a:rPr sz="1600" b="1" i="0">
+                <a:solidFill>
+                  <a:srgbClr val="2B2B2B"/>
+                </a:solidFill>
+                <a:latin typeface="Calibri"/>
+              </a:rPr>
+              <a:t>marco referencial completo</a:t>
+            </a:r>
+            <a:r>
+              <a:rPr sz="1600" b="0" i="0">
+                <a:solidFill>
+                  <a:srgbClr val="2B2B2B"/>
+                </a:solidFill>
+                <a:latin typeface="Calibri"/>
+              </a:rPr>
+              <a:t> con las dos piezas que faltan:</a:t>
+            </a:r>
+          </a:p>
+          <a:p>
+            <a:pPr lvl="1">
+              <a:spcAft>
+                <a:spcPts val="600"/>
+              </a:spcAft>
+            </a:pPr>
+            <a:r>
+              <a:rPr sz="1500" b="0" i="0">
+                <a:solidFill>
+                  <a:srgbClr val="2B2B2B"/>
+                </a:solidFill>
+                <a:latin typeface="Calibri"/>
+              </a:rPr>
+              <a:t>●   </a:t>
+            </a:r>
+            <a:r>
+              <a:rPr sz="1500" b="1" i="0">
+                <a:solidFill>
+                  <a:srgbClr val="2B2B2B"/>
+                </a:solidFill>
+                <a:latin typeface="Calibri"/>
+              </a:rPr>
+              <a:t>Marco legal</a:t>
+            </a:r>
+            <a:r>
+              <a:rPr sz="1500" b="0" i="0">
+                <a:solidFill>
+                  <a:srgbClr val="2B2B2B"/>
+                </a:solidFill>
+                <a:latin typeface="Calibri"/>
+              </a:rPr>
+              <a:t> — decidir si aplica, y si aplica, redactarlo con normas reales.</a:t>
+            </a:r>
+          </a:p>
+          <a:p>
+            <a:pPr lvl="1">
+              <a:spcAft>
+                <a:spcPts val="600"/>
+              </a:spcAft>
+            </a:pPr>
+            <a:r>
+              <a:rPr sz="1500" b="0" i="0">
+                <a:solidFill>
+                  <a:srgbClr val="2B2B2B"/>
+                </a:solidFill>
+                <a:latin typeface="Calibri"/>
+              </a:rPr>
+              <a:t>●   </a:t>
+            </a:r>
+            <a:r>
+              <a:rPr sz="1500" b="1" i="0">
+                <a:solidFill>
+                  <a:srgbClr val="2B2B2B"/>
+                </a:solidFill>
+                <a:latin typeface="Calibri"/>
+              </a:rPr>
+              <a:t>Clínica de APA 7</a:t>
+            </a:r>
+            <a:r>
+              <a:rPr sz="1500" b="0" i="0">
+                <a:solidFill>
+                  <a:srgbClr val="2B2B2B"/>
+                </a:solidFill>
+                <a:latin typeface="Calibri"/>
+              </a:rPr>
+              <a:t> — dejar citas y referencias sin un solo cabo suelto.</a:t>
+            </a:r>
+          </a:p>
+          <a:p>
+            <a:pPr>
+              <a:spcAft>
+                <a:spcPts val="1000"/>
+              </a:spcAft>
+            </a:pPr>
+            <a:r>
+              <a:rPr sz="1600" b="0" i="0">
+                <a:solidFill>
+                  <a:srgbClr val="2B2B2B"/>
+                </a:solidFill>
+                <a:latin typeface="Calibri"/>
+              </a:rPr>
+              <a:t>–   Regla del día: </a:t>
+            </a:r>
+            <a:r>
+              <a:rPr sz="1600" b="1" i="0">
+                <a:solidFill>
+                  <a:srgbClr val="2B2B2B"/>
+                </a:solidFill>
+                <a:latin typeface="Calibri"/>
+              </a:rPr>
+              <a:t>ninguna cita sin referencia, ninguna referencia sin cita, ninguna ley inventada</a:t>
+            </a:r>
+            <a:r>
+              <a:rPr sz="1600" b="0" i="0">
+                <a:solidFill>
+                  <a:srgbClr val="2B2B2B"/>
+                </a:solidFill>
+                <a:latin typeface="Calibri"/>
+              </a:rPr>
+              <a:t>.</a:t>
+            </a:r>
+          </a:p>
+        </p:txBody>
+      </p:sp>
+      <p:sp>
+        <p:nvSpPr>
+          <p:cNvPr id="5" name="TextBox 4"/>
+          <p:cNvSpPr txBox="1"/>
+          <p:nvPr/>
+        </p:nvSpPr>
+        <p:spPr>
+          <a:xfrm>
+            <a:off x="11094415" y="6446520"/>
+            <a:ext cx="548640" cy="274320"/>
+          </a:xfrm>
+          <a:prstGeom prst="rect">
+            <a:avLst/>
+          </a:prstGeom>
+          <a:noFill/>
+        </p:spPr>
+        <p:txBody>
+          <a:bodyPr wrap="square" anchor="t" lIns="0" rIns="0" tIns="0" bIns="0">
+            <a:spAutoFit/>
+          </a:bodyPr>
+          <a:lstStyle/>
+          <a:p>
+            <a:pPr algn="r"/>
+            <a:r>
+              <a:rPr sz="1000" b="1" i="0">
+                <a:solidFill>
+                  <a:srgbClr val="8F989D"/>
+                </a:solidFill>
+                <a:latin typeface="Calibri"/>
+              </a:rPr>
+              <a:t>2</a:t>
+            </a:r>
+          </a:p>
+        </p:txBody>
+      </p:sp>
+    </p:spTree>
+  </p:cSld>
+  <p:clrMapOvr>
+    <a:masterClrMapping/>
+  </p:clrMapOvr>
+</p:sld>
+</file>
+
+<file path=ppt/slides/slide20.xml><?xml version="1.0" encoding="utf-8"?>
 <p:sld xmlns:a="http://schemas.openxmlformats.org/drawingml/2006/main" xmlns:p="http://schemas.openxmlformats.org/presentationml/2006/main" xmlns:r="http://schemas.openxmlformats.org/officeDocument/2006/relationships">
   <p:cSld>
     <p:bg>
@@ -7616,457 +9433,6 @@
                 <a:latin typeface="Calibri"/>
               </a:rPr>
               <a:t>PROYECTO I</a:t>
-            </a:r>
-          </a:p>
-        </p:txBody>
-      </p:sp>
-    </p:spTree>
-  </p:cSld>
-  <p:clrMapOvr>
-    <a:masterClrMapping/>
-  </p:clrMapOvr>
-</p:sld>
-</file>
-
-<file path=ppt/slides/slide2.xml><?xml version="1.0" encoding="utf-8"?>
-<p:sld xmlns:a="http://schemas.openxmlformats.org/drawingml/2006/main" xmlns:p="http://schemas.openxmlformats.org/presentationml/2006/main" xmlns:r="http://schemas.openxmlformats.org/officeDocument/2006/relationships">
-  <p:cSld>
-    <p:bg>
-      <p:bgPr>
-        <a:solidFill>
-          <a:srgbClr val="FFFFFF"/>
-        </a:solidFill>
-        <a:effectLst/>
-      </p:bgPr>
-    </p:bg>
-    <p:spTree>
-      <p:nvGrpSpPr>
-        <p:cNvPr id="1" name=""/>
-        <p:cNvGrpSpPr/>
-        <p:nvPr/>
-      </p:nvGrpSpPr>
-      <p:grpSpPr/>
-      <p:sp>
-        <p:nvSpPr>
-          <p:cNvPr id="2" name="Rectangle 1"/>
-          <p:cNvSpPr/>
-          <p:nvPr/>
-        </p:nvSpPr>
-        <p:spPr>
-          <a:xfrm>
-            <a:off x="0" y="0"/>
-            <a:ext cx="12191695" cy="1188720"/>
-          </a:xfrm>
-          <a:prstGeom prst="rect">
-            <a:avLst/>
-          </a:prstGeom>
-          <a:solidFill>
-            <a:srgbClr val="0C2340"/>
-          </a:solidFill>
-          <a:ln>
-            <a:noFill/>
-          </a:ln>
-          <a:effectLst/>
-        </p:spPr>
-        <p:style>
-          <a:lnRef idx="1">
-            <a:schemeClr val="accent1"/>
-          </a:lnRef>
-          <a:fillRef idx="3">
-            <a:schemeClr val="accent1"/>
-          </a:fillRef>
-          <a:effectRef idx="2">
-            <a:schemeClr val="accent1"/>
-          </a:effectRef>
-          <a:fontRef idx="minor">
-            <a:schemeClr val="lt1"/>
-          </a:fontRef>
-        </p:style>
-        <p:txBody>
-          <a:bodyPr rtlCol="0" anchor="ctr"/>
-          <a:lstStyle/>
-          <a:p>
-            <a:pPr algn="ctr"/>
-          </a:p>
-        </p:txBody>
-      </p:sp>
-      <p:sp>
-        <p:nvSpPr>
-          <p:cNvPr id="3" name="TextBox 2"/>
-          <p:cNvSpPr txBox="1"/>
-          <p:nvPr/>
-        </p:nvSpPr>
-        <p:spPr>
-          <a:xfrm>
-            <a:off x="640080" y="0"/>
-            <a:ext cx="9082735" cy="1188720"/>
-          </a:xfrm>
-          <a:prstGeom prst="rect">
-            <a:avLst/>
-          </a:prstGeom>
-          <a:noFill/>
-        </p:spPr>
-        <p:txBody>
-          <a:bodyPr wrap="square" anchor="ctr" lIns="0" rIns="0" tIns="0" bIns="0">
-            <a:spAutoFit/>
-          </a:bodyPr>
-          <a:lstStyle/>
-          <a:p>
-            <a:pPr algn="ctr"/>
-            <a:r>
-              <a:rPr sz="2600" b="1" i="0">
-                <a:solidFill>
-                  <a:srgbClr val="FFFFFF"/>
-                </a:solidFill>
-                <a:latin typeface="Calibri"/>
-              </a:rPr>
-              <a:t>Dos cosas pueden hundir un anteproyecto de IA en la última revisión</a:t>
-            </a:r>
-          </a:p>
-        </p:txBody>
-      </p:sp>
-      <p:sp>
-        <p:nvSpPr>
-          <p:cNvPr id="4" name="TextBox 3"/>
-          <p:cNvSpPr txBox="1"/>
-          <p:nvPr/>
-        </p:nvSpPr>
-        <p:spPr>
-          <a:xfrm>
-            <a:off x="640080" y="1691639"/>
-            <a:ext cx="10911535" cy="4617720"/>
-          </a:xfrm>
-          <a:prstGeom prst="rect">
-            <a:avLst/>
-          </a:prstGeom>
-          <a:noFill/>
-        </p:spPr>
-        <p:txBody>
-          <a:bodyPr wrap="square" anchor="t" lIns="0" rIns="0" tIns="0" bIns="0">
-            <a:spAutoFit/>
-          </a:bodyPr>
-          <a:lstStyle/>
-          <a:p>
-            <a:pPr>
-              <a:spcAft>
-                <a:spcPts val="1000"/>
-              </a:spcAft>
-            </a:pPr>
-            <a:r>
-              <a:rPr sz="1600" b="0" i="0">
-                <a:solidFill>
-                  <a:srgbClr val="2B2B2B"/>
-                </a:solidFill>
-                <a:latin typeface="Calibri"/>
-              </a:rPr>
-              <a:t>–   Caso real y frecuente: un equipo propone un </a:t>
-            </a:r>
-            <a:r>
-              <a:rPr sz="1600" b="1" i="0">
-                <a:solidFill>
-                  <a:srgbClr val="2B2B2B"/>
-                </a:solidFill>
-                <a:latin typeface="Calibri"/>
-              </a:rPr>
-              <a:t>modelo que clasifica PQRS</a:t>
-            </a:r>
-            <a:r>
-              <a:rPr sz="1600" b="0" i="0">
-                <a:solidFill>
-                  <a:srgbClr val="2B2B2B"/>
-                </a:solidFill>
-                <a:latin typeface="Calibri"/>
-              </a:rPr>
-              <a:t> de una secretaría de salud municipal.</a:t>
-            </a:r>
-          </a:p>
-          <a:p>
-            <a:pPr lvl="1">
-              <a:spcAft>
-                <a:spcPts val="600"/>
-              </a:spcAft>
-            </a:pPr>
-            <a:r>
-              <a:rPr sz="1500" b="0" i="0">
-                <a:solidFill>
-                  <a:srgbClr val="2B2B2B"/>
-                </a:solidFill>
-                <a:latin typeface="Calibri"/>
-              </a:rPr>
-              <a:t>●   Las PQRS traen nombre, cédula, teléfono y diagnóstico: eso es </a:t>
-            </a:r>
-            <a:r>
-              <a:rPr sz="1500" b="1" i="0">
-                <a:solidFill>
-                  <a:srgbClr val="2B2B2B"/>
-                </a:solidFill>
-                <a:latin typeface="Calibri"/>
-              </a:rPr>
-              <a:t>dato personal</a:t>
-            </a:r>
-            <a:r>
-              <a:rPr sz="1500" b="0" i="0">
-                <a:solidFill>
-                  <a:srgbClr val="2B2B2B"/>
-                </a:solidFill>
-                <a:latin typeface="Calibri"/>
-              </a:rPr>
-              <a:t>, y algunos son </a:t>
-            </a:r>
-            <a:r>
-              <a:rPr sz="1500" b="1" i="0">
-                <a:solidFill>
-                  <a:srgbClr val="2B2B2B"/>
-                </a:solidFill>
-                <a:latin typeface="Calibri"/>
-              </a:rPr>
-              <a:t>datos sensibles</a:t>
-            </a:r>
-            <a:r>
-              <a:rPr sz="1500" b="0" i="0">
-                <a:solidFill>
-                  <a:srgbClr val="2B2B2B"/>
-                </a:solidFill>
-                <a:latin typeface="Calibri"/>
-              </a:rPr>
-              <a:t>.</a:t>
-            </a:r>
-          </a:p>
-          <a:p>
-            <a:pPr lvl="1">
-              <a:spcAft>
-                <a:spcPts val="600"/>
-              </a:spcAft>
-            </a:pPr>
-            <a:r>
-              <a:rPr sz="1500" b="0" i="0">
-                <a:solidFill>
-                  <a:srgbClr val="2B2B2B"/>
-                </a:solidFill>
-                <a:latin typeface="Calibri"/>
-              </a:rPr>
-              <a:t>●   El anteproyecto no menciona ni una norma. Resultado: la propuesta es inviable antes de empezar.</a:t>
-            </a:r>
-          </a:p>
-          <a:p>
-            <a:pPr>
-              <a:spcAft>
-                <a:spcPts val="1000"/>
-              </a:spcAft>
-            </a:pPr>
-            <a:r>
-              <a:rPr sz="1600" b="0" i="0">
-                <a:solidFill>
-                  <a:srgbClr val="2B2B2B"/>
-                </a:solidFill>
-                <a:latin typeface="Calibri"/>
-              </a:rPr>
-              <a:t>–   Segundo caso: el documento tiene 18 referencias al final y solo 6 aparecen citadas en el texto.</a:t>
-            </a:r>
-          </a:p>
-          <a:p>
-            <a:pPr lvl="1">
-              <a:spcAft>
-                <a:spcPts val="600"/>
-              </a:spcAft>
-            </a:pPr>
-            <a:r>
-              <a:rPr sz="1500" b="0" i="0">
-                <a:solidFill>
-                  <a:srgbClr val="2B2B2B"/>
-                </a:solidFill>
-                <a:latin typeface="Calibri"/>
-              </a:rPr>
-              <a:t>●   Las otras 12 son </a:t>
-            </a:r>
-            <a:r>
-              <a:rPr sz="1500" b="1" i="0">
-                <a:solidFill>
-                  <a:srgbClr val="2B2B2B"/>
-                </a:solidFill>
-                <a:latin typeface="Calibri"/>
-              </a:rPr>
-              <a:t>bibliografía huérfana</a:t>
-            </a:r>
-            <a:r>
-              <a:rPr sz="1500" b="0" i="0">
-                <a:solidFill>
-                  <a:srgbClr val="2B2B2B"/>
-                </a:solidFill>
-                <a:latin typeface="Calibri"/>
-              </a:rPr>
-              <a:t>: se ven como relleno y bajan la nota de todo el marco referencial.</a:t>
-            </a:r>
-          </a:p>
-          <a:p>
-            <a:pPr>
-              <a:spcAft>
-                <a:spcPts val="1000"/>
-              </a:spcAft>
-            </a:pPr>
-            <a:r>
-              <a:rPr sz="1600" b="0" i="0">
-                <a:solidFill>
-                  <a:srgbClr val="2B2B2B"/>
-                </a:solidFill>
-                <a:latin typeface="Calibri"/>
-              </a:rPr>
-              <a:t>–   Hoy cerramos el </a:t>
-            </a:r>
-            <a:r>
-              <a:rPr sz="1600" b="1" i="0">
-                <a:solidFill>
-                  <a:srgbClr val="2B2B2B"/>
-                </a:solidFill>
-                <a:latin typeface="Calibri"/>
-              </a:rPr>
-              <a:t>marco referencial completo</a:t>
-            </a:r>
-            <a:r>
-              <a:rPr sz="1600" b="0" i="0">
-                <a:solidFill>
-                  <a:srgbClr val="2B2B2B"/>
-                </a:solidFill>
-                <a:latin typeface="Calibri"/>
-              </a:rPr>
-              <a:t> con las dos piezas que faltan:</a:t>
-            </a:r>
-          </a:p>
-          <a:p>
-            <a:pPr lvl="1">
-              <a:spcAft>
-                <a:spcPts val="600"/>
-              </a:spcAft>
-            </a:pPr>
-            <a:r>
-              <a:rPr sz="1500" b="0" i="0">
-                <a:solidFill>
-                  <a:srgbClr val="2B2B2B"/>
-                </a:solidFill>
-                <a:latin typeface="Calibri"/>
-              </a:rPr>
-              <a:t>●   </a:t>
-            </a:r>
-            <a:r>
-              <a:rPr sz="1500" b="1" i="0">
-                <a:solidFill>
-                  <a:srgbClr val="2B2B2B"/>
-                </a:solidFill>
-                <a:latin typeface="Calibri"/>
-              </a:rPr>
-              <a:t>Marco legal</a:t>
-            </a:r>
-            <a:r>
-              <a:rPr sz="1500" b="0" i="0">
-                <a:solidFill>
-                  <a:srgbClr val="2B2B2B"/>
-                </a:solidFill>
-                <a:latin typeface="Calibri"/>
-              </a:rPr>
-              <a:t> — decidir si aplica, y si aplica, redactarlo con normas reales.</a:t>
-            </a:r>
-          </a:p>
-          <a:p>
-            <a:pPr lvl="1">
-              <a:spcAft>
-                <a:spcPts val="600"/>
-              </a:spcAft>
-            </a:pPr>
-            <a:r>
-              <a:rPr sz="1500" b="0" i="0">
-                <a:solidFill>
-                  <a:srgbClr val="2B2B2B"/>
-                </a:solidFill>
-                <a:latin typeface="Calibri"/>
-              </a:rPr>
-              <a:t>●   </a:t>
-            </a:r>
-            <a:r>
-              <a:rPr sz="1500" b="1" i="0">
-                <a:solidFill>
-                  <a:srgbClr val="2B2B2B"/>
-                </a:solidFill>
-                <a:latin typeface="Calibri"/>
-              </a:rPr>
-              <a:t>Clínica de APA 7</a:t>
-            </a:r>
-            <a:r>
-              <a:rPr sz="1500" b="0" i="0">
-                <a:solidFill>
-                  <a:srgbClr val="2B2B2B"/>
-                </a:solidFill>
-                <a:latin typeface="Calibri"/>
-              </a:rPr>
-              <a:t> — dejar citas y referencias sin un solo cabo suelto.</a:t>
-            </a:r>
-          </a:p>
-          <a:p>
-            <a:pPr>
-              <a:spcAft>
-                <a:spcPts val="1000"/>
-              </a:spcAft>
-            </a:pPr>
-            <a:r>
-              <a:rPr sz="1600" b="0" i="0">
-                <a:solidFill>
-                  <a:srgbClr val="2B2B2B"/>
-                </a:solidFill>
-                <a:latin typeface="Calibri"/>
-              </a:rPr>
-              <a:t>–   Regla del día: </a:t>
-            </a:r>
-            <a:r>
-              <a:rPr sz="1600" b="1" i="0">
-                <a:solidFill>
-                  <a:srgbClr val="2B2B2B"/>
-                </a:solidFill>
-                <a:latin typeface="Calibri"/>
-              </a:rPr>
-              <a:t>ninguna cita sin referencia, ninguna referencia sin cita, ninguna ley inventada</a:t>
-            </a:r>
-            <a:r>
-              <a:rPr sz="1600" b="0" i="0">
-                <a:solidFill>
-                  <a:srgbClr val="2B2B2B"/>
-                </a:solidFill>
-                <a:latin typeface="Calibri"/>
-              </a:rPr>
-              <a:t>.</a:t>
-            </a:r>
-          </a:p>
-        </p:txBody>
-      </p:sp>
-      <p:sp>
-        <p:nvSpPr>
-          <p:cNvPr id="5" name="TextBox 4"/>
-          <p:cNvSpPr txBox="1"/>
-          <p:nvPr/>
-        </p:nvSpPr>
-        <p:spPr>
-          <a:xfrm>
-            <a:off x="11094415" y="6446520"/>
-            <a:ext cx="548640" cy="274320"/>
-          </a:xfrm>
-          <a:prstGeom prst="rect">
-            <a:avLst/>
-          </a:prstGeom>
-          <a:noFill/>
-        </p:spPr>
-        <p:txBody>
-          <a:bodyPr wrap="square" anchor="t" lIns="0" rIns="0" tIns="0" bIns="0">
-            <a:spAutoFit/>
-          </a:bodyPr>
-          <a:lstStyle/>
-          <a:p>
-            <a:pPr algn="r"/>
-            <a:r>
-              <a:rPr sz="1000" b="1" i="0">
-                <a:solidFill>
-                  <a:srgbClr val="8F989D"/>
-                </a:solidFill>
-                <a:latin typeface="Calibri"/>
-              </a:rPr>
-              <a:t>2</a:t>
             </a:r>
           </a:p>
         </p:txBody>
